--- a/results/250916_Project_Update.pptx
+++ b/results/250916_Project_Update.pptx
@@ -5,17 +5,23 @@
     <p:sldMasterId id="2147483648" r:id="rId4"/>
   </p:sldMasterIdLst>
   <p:notesMasterIdLst>
-    <p:notesMasterId r:id="rId10"/>
+    <p:notesMasterId r:id="rId16"/>
   </p:notesMasterIdLst>
   <p:handoutMasterIdLst>
-    <p:handoutMasterId r:id="rId11"/>
+    <p:handoutMasterId r:id="rId17"/>
   </p:handoutMasterIdLst>
   <p:sldIdLst>
     <p:sldId id="372" r:id="rId5"/>
-    <p:sldId id="383" r:id="rId6"/>
-    <p:sldId id="385" r:id="rId7"/>
-    <p:sldId id="384" r:id="rId8"/>
-    <p:sldId id="386" r:id="rId9"/>
+    <p:sldId id="387" r:id="rId6"/>
+    <p:sldId id="388" r:id="rId7"/>
+    <p:sldId id="392" r:id="rId8"/>
+    <p:sldId id="389" r:id="rId9"/>
+    <p:sldId id="390" r:id="rId10"/>
+    <p:sldId id="391" r:id="rId11"/>
+    <p:sldId id="383" r:id="rId12"/>
+    <p:sldId id="385" r:id="rId13"/>
+    <p:sldId id="384" r:id="rId14"/>
+    <p:sldId id="386" r:id="rId15"/>
   </p:sldIdLst>
   <p:sldSz cx="12192000" cy="6858000"/>
   <p:notesSz cx="6858000" cy="9144000"/>
@@ -218,7 +224,7 @@
           <a:p>
             <a:fld id="{412A36AD-C140-47B5-A0AA-2808AF1C1C9D}" type="datetimeFigureOut">
               <a:rPr lang="en-AU" smtClean="0"/>
-              <a:t>11/9/2025</a:t>
+              <a:t>16/9/2025</a:t>
             </a:fld>
             <a:endParaRPr lang="en-AU"/>
           </a:p>
@@ -383,7 +389,7 @@
           <a:p>
             <a:fld id="{2763829E-EB69-4A98-9D54-8D6822520B27}" type="datetimeFigureOut">
               <a:rPr lang="en-AU" smtClean="0"/>
-              <a:t>11/9/2025</a:t>
+              <a:t>16/9/2025</a:t>
             </a:fld>
             <a:endParaRPr lang="en-AU"/>
           </a:p>
@@ -33250,6 +33256,412 @@
 </p:sld>
 </file>
 
+<file path=ppt/slides/slide10.xml><?xml version="1.0" encoding="utf-8"?>
+<p:sld xmlns:a="http://schemas.openxmlformats.org/drawingml/2006/main" xmlns:r="http://schemas.openxmlformats.org/officeDocument/2006/relationships" xmlns:p="http://schemas.openxmlformats.org/presentationml/2006/main">
+  <p:cSld>
+    <p:spTree>
+      <p:nvGrpSpPr>
+        <p:cNvPr id="1" name="">
+          <a:extLst>
+            <a:ext uri="{FF2B5EF4-FFF2-40B4-BE49-F238E27FC236}">
+              <a16:creationId xmlns:a16="http://schemas.microsoft.com/office/drawing/2014/main" id="{C370CD9C-7ABD-373E-1EA8-D37E31FFFF17}"/>
+            </a:ext>
+          </a:extLst>
+        </p:cNvPr>
+        <p:cNvGrpSpPr/>
+        <p:nvPr/>
+      </p:nvGrpSpPr>
+      <p:grpSpPr>
+        <a:xfrm>
+          <a:off x="0" y="0"/>
+          <a:ext cx="0" cy="0"/>
+          <a:chOff x="0" y="0"/>
+          <a:chExt cx="0" cy="0"/>
+        </a:xfrm>
+      </p:grpSpPr>
+      <p:sp>
+        <p:nvSpPr>
+          <p:cNvPr id="5" name="Slide Number Placeholder 4">
+            <a:extLst>
+              <a:ext uri="{FF2B5EF4-FFF2-40B4-BE49-F238E27FC236}">
+                <a16:creationId xmlns:a16="http://schemas.microsoft.com/office/drawing/2014/main" id="{CB47E829-DF3A-9387-D25D-A5EDBFB72276}"/>
+              </a:ext>
+            </a:extLst>
+          </p:cNvPr>
+          <p:cNvSpPr>
+            <a:spLocks noGrp="1"/>
+          </p:cNvSpPr>
+          <p:nvPr>
+            <p:ph type="sldNum" sz="quarter" idx="18"/>
+          </p:nvPr>
+        </p:nvSpPr>
+        <p:spPr>
+          <a:xfrm>
+            <a:off x="11208568" y="6526800"/>
+            <a:ext cx="288032" cy="108000"/>
+          </a:xfrm>
+        </p:spPr>
+        <p:txBody>
+          <a:bodyPr anchor="ctr">
+            <a:normAutofit/>
+          </a:bodyPr>
+          <a:lstStyle/>
+          <a:p>
+            <a:pPr>
+              <a:spcAft>
+                <a:spcPts val="600"/>
+              </a:spcAft>
+            </a:pPr>
+            <a:fld id="{E917DE0E-AFB1-41FD-BC35-27DB61CA125F}" type="slidenum">
+              <a:rPr lang="en-AU" sz="700" smtClean="0"/>
+              <a:pPr>
+                <a:spcAft>
+                  <a:spcPts val="600"/>
+                </a:spcAft>
+              </a:pPr>
+              <a:t>10</a:t>
+            </a:fld>
+            <a:endParaRPr lang="en-AU" sz="700"/>
+          </a:p>
+        </p:txBody>
+      </p:sp>
+      <p:sp>
+        <p:nvSpPr>
+          <p:cNvPr id="4" name="Title 3">
+            <a:extLst>
+              <a:ext uri="{FF2B5EF4-FFF2-40B4-BE49-F238E27FC236}">
+                <a16:creationId xmlns:a16="http://schemas.microsoft.com/office/drawing/2014/main" id="{2C762DEC-1CD9-028A-503D-0A96EDD9F2EA}"/>
+              </a:ext>
+            </a:extLst>
+          </p:cNvPr>
+          <p:cNvSpPr>
+            <a:spLocks noGrp="1"/>
+          </p:cNvSpPr>
+          <p:nvPr>
+            <p:ph type="title"/>
+          </p:nvPr>
+        </p:nvSpPr>
+        <p:spPr/>
+        <p:txBody>
+          <a:bodyPr/>
+          <a:lstStyle/>
+          <a:p>
+            <a:r>
+              <a:rPr lang="en-US" dirty="0" err="1"/>
+              <a:t>rrnDB</a:t>
+            </a:r>
+            <a:r>
+              <a:rPr lang="en-US" dirty="0"/>
+              <a:t>: The Ribosomal RNA Database</a:t>
+            </a:r>
+          </a:p>
+        </p:txBody>
+      </p:sp>
+      <p:pic>
+        <p:nvPicPr>
+          <p:cNvPr id="12" name="Content Placeholder 11" descr="A close-up of a document&#10;&#10;AI-generated content may be incorrect.">
+            <a:extLst>
+              <a:ext uri="{FF2B5EF4-FFF2-40B4-BE49-F238E27FC236}">
+                <a16:creationId xmlns:a16="http://schemas.microsoft.com/office/drawing/2014/main" id="{4E611383-8638-B971-1D00-A8331E0D4ACD}"/>
+              </a:ext>
+            </a:extLst>
+          </p:cNvPr>
+          <p:cNvPicPr>
+            <a:picLocks noGrp="1" noChangeAspect="1"/>
+          </p:cNvPicPr>
+          <p:nvPr>
+            <p:ph sz="quarter" idx="10"/>
+          </p:nvPr>
+        </p:nvPicPr>
+        <p:blipFill>
+          <a:blip r:embed="rId2"/>
+          <a:stretch>
+            <a:fillRect/>
+          </a:stretch>
+        </p:blipFill>
+        <p:spPr>
+          <a:xfrm>
+            <a:off x="695325" y="1597494"/>
+            <a:ext cx="9577388" cy="4348813"/>
+          </a:xfrm>
+        </p:spPr>
+      </p:pic>
+    </p:spTree>
+    <p:extLst>
+      <p:ext uri="{BB962C8B-B14F-4D97-AF65-F5344CB8AC3E}">
+        <p14:creationId xmlns:p14="http://schemas.microsoft.com/office/powerpoint/2010/main" val="4289535149"/>
+      </p:ext>
+    </p:extLst>
+  </p:cSld>
+  <p:clrMapOvr>
+    <a:masterClrMapping/>
+  </p:clrMapOvr>
+  <mc:AlternateContent xmlns:mc="http://schemas.openxmlformats.org/markup-compatibility/2006" xmlns:p14="http://schemas.microsoft.com/office/powerpoint/2010/main">
+    <mc:Choice Requires="p14">
+      <p:transition spd="med" p14:dur="700">
+        <p:fade/>
+      </p:transition>
+    </mc:Choice>
+    <mc:Fallback xmlns="">
+      <p:transition spd="med">
+        <p:fade/>
+      </p:transition>
+    </mc:Fallback>
+  </mc:AlternateContent>
+</p:sld>
+</file>
+
+<file path=ppt/slides/slide11.xml><?xml version="1.0" encoding="utf-8"?>
+<p:sld xmlns:a="http://schemas.openxmlformats.org/drawingml/2006/main" xmlns:r="http://schemas.openxmlformats.org/officeDocument/2006/relationships" xmlns:p="http://schemas.openxmlformats.org/presentationml/2006/main">
+  <p:cSld>
+    <p:spTree>
+      <p:nvGrpSpPr>
+        <p:cNvPr id="1" name="">
+          <a:extLst>
+            <a:ext uri="{FF2B5EF4-FFF2-40B4-BE49-F238E27FC236}">
+              <a16:creationId xmlns:a16="http://schemas.microsoft.com/office/drawing/2014/main" id="{1E1A17ED-BB1D-276E-713B-A104785A0F8B}"/>
+            </a:ext>
+          </a:extLst>
+        </p:cNvPr>
+        <p:cNvGrpSpPr/>
+        <p:nvPr/>
+      </p:nvGrpSpPr>
+      <p:grpSpPr>
+        <a:xfrm>
+          <a:off x="0" y="0"/>
+          <a:ext cx="0" cy="0"/>
+          <a:chOff x="0" y="0"/>
+          <a:chExt cx="0" cy="0"/>
+        </a:xfrm>
+      </p:grpSpPr>
+      <p:sp>
+        <p:nvSpPr>
+          <p:cNvPr id="5" name="Slide Number Placeholder 4">
+            <a:extLst>
+              <a:ext uri="{FF2B5EF4-FFF2-40B4-BE49-F238E27FC236}">
+                <a16:creationId xmlns:a16="http://schemas.microsoft.com/office/drawing/2014/main" id="{2139AEB6-4847-4DE7-B801-AB65FF2C0AED}"/>
+              </a:ext>
+            </a:extLst>
+          </p:cNvPr>
+          <p:cNvSpPr>
+            <a:spLocks noGrp="1"/>
+          </p:cNvSpPr>
+          <p:nvPr>
+            <p:ph type="sldNum" sz="quarter" idx="18"/>
+          </p:nvPr>
+        </p:nvSpPr>
+        <p:spPr>
+          <a:xfrm>
+            <a:off x="11208568" y="6526800"/>
+            <a:ext cx="288032" cy="108000"/>
+          </a:xfrm>
+        </p:spPr>
+        <p:txBody>
+          <a:bodyPr anchor="ctr">
+            <a:normAutofit/>
+          </a:bodyPr>
+          <a:lstStyle/>
+          <a:p>
+            <a:pPr>
+              <a:spcAft>
+                <a:spcPts val="600"/>
+              </a:spcAft>
+            </a:pPr>
+            <a:fld id="{E917DE0E-AFB1-41FD-BC35-27DB61CA125F}" type="slidenum">
+              <a:rPr lang="en-AU" sz="700" smtClean="0"/>
+              <a:pPr>
+                <a:spcAft>
+                  <a:spcPts val="600"/>
+                </a:spcAft>
+              </a:pPr>
+              <a:t>11</a:t>
+            </a:fld>
+            <a:endParaRPr lang="en-AU" sz="700"/>
+          </a:p>
+        </p:txBody>
+      </p:sp>
+      <p:sp>
+        <p:nvSpPr>
+          <p:cNvPr id="4" name="Title 3">
+            <a:extLst>
+              <a:ext uri="{FF2B5EF4-FFF2-40B4-BE49-F238E27FC236}">
+                <a16:creationId xmlns:a16="http://schemas.microsoft.com/office/drawing/2014/main" id="{E3F22A10-DC18-9763-581A-EB12AD10B288}"/>
+              </a:ext>
+            </a:extLst>
+          </p:cNvPr>
+          <p:cNvSpPr>
+            <a:spLocks noGrp="1"/>
+          </p:cNvSpPr>
+          <p:nvPr>
+            <p:ph type="title"/>
+          </p:nvPr>
+        </p:nvSpPr>
+        <p:spPr/>
+        <p:txBody>
+          <a:bodyPr/>
+          <a:lstStyle/>
+          <a:p>
+            <a:r>
+              <a:rPr lang="en-US" dirty="0" err="1"/>
+              <a:t>rrnDB</a:t>
+            </a:r>
+            <a:r>
+              <a:rPr lang="en-US" dirty="0"/>
+              <a:t>: Records Curation</a:t>
+            </a:r>
+            <a:br>
+              <a:rPr lang="en-US" dirty="0"/>
+            </a:br>
+            <a:endParaRPr lang="en-US" dirty="0"/>
+          </a:p>
+        </p:txBody>
+      </p:sp>
+      <p:sp>
+        <p:nvSpPr>
+          <p:cNvPr id="3" name="Content Placeholder 2">
+            <a:extLst>
+              <a:ext uri="{FF2B5EF4-FFF2-40B4-BE49-F238E27FC236}">
+                <a16:creationId xmlns:a16="http://schemas.microsoft.com/office/drawing/2014/main" id="{37821F7B-BC93-AAEB-AD8D-927664A6DA35}"/>
+              </a:ext>
+            </a:extLst>
+          </p:cNvPr>
+          <p:cNvSpPr>
+            <a:spLocks noGrp="1"/>
+          </p:cNvSpPr>
+          <p:nvPr>
+            <p:ph sz="quarter" idx="10"/>
+          </p:nvPr>
+        </p:nvSpPr>
+        <p:spPr/>
+        <p:txBody>
+          <a:bodyPr/>
+          <a:lstStyle/>
+          <a:p>
+            <a:r>
+              <a:rPr lang="en-US" b="0" dirty="0"/>
+              <a:t>48077 Bacteria records representing 12138 species</a:t>
+            </a:r>
+          </a:p>
+          <a:p>
+            <a:endParaRPr lang="en-US" dirty="0"/>
+          </a:p>
+        </p:txBody>
+      </p:sp>
+      <p:pic>
+        <p:nvPicPr>
+          <p:cNvPr id="7" name="Picture 6" descr="A white background with black and white clouds&#10;&#10;AI-generated content may be incorrect.">
+            <a:extLst>
+              <a:ext uri="{FF2B5EF4-FFF2-40B4-BE49-F238E27FC236}">
+                <a16:creationId xmlns:a16="http://schemas.microsoft.com/office/drawing/2014/main" id="{C766F0BD-8035-C6EA-FE16-BD7443DD9EFC}"/>
+              </a:ext>
+            </a:extLst>
+          </p:cNvPr>
+          <p:cNvPicPr>
+            <a:picLocks noChangeAspect="1"/>
+          </p:cNvPicPr>
+          <p:nvPr/>
+        </p:nvPicPr>
+        <p:blipFill>
+          <a:blip r:embed="rId2"/>
+          <a:stretch>
+            <a:fillRect/>
+          </a:stretch>
+        </p:blipFill>
+        <p:spPr>
+          <a:xfrm>
+            <a:off x="142446" y="1752600"/>
+            <a:ext cx="11907107" cy="1659452"/>
+          </a:xfrm>
+          <a:prstGeom prst="rect">
+            <a:avLst/>
+          </a:prstGeom>
+        </p:spPr>
+      </p:pic>
+      <p:pic>
+        <p:nvPicPr>
+          <p:cNvPr id="6" name="Picture 5" descr="A screenshot of a computer&#10;&#10;AI-generated content may be incorrect.">
+            <a:extLst>
+              <a:ext uri="{FF2B5EF4-FFF2-40B4-BE49-F238E27FC236}">
+                <a16:creationId xmlns:a16="http://schemas.microsoft.com/office/drawing/2014/main" id="{B86AF5C7-AD1E-8F07-B77B-0C95F2688035}"/>
+              </a:ext>
+            </a:extLst>
+          </p:cNvPr>
+          <p:cNvPicPr>
+            <a:picLocks noChangeAspect="1"/>
+          </p:cNvPicPr>
+          <p:nvPr/>
+        </p:nvPicPr>
+        <p:blipFill>
+          <a:blip r:embed="rId3"/>
+          <a:stretch>
+            <a:fillRect/>
+          </a:stretch>
+        </p:blipFill>
+        <p:spPr>
+          <a:xfrm>
+            <a:off x="381000" y="3581400"/>
+            <a:ext cx="4510235" cy="2677730"/>
+          </a:xfrm>
+          <a:prstGeom prst="rect">
+            <a:avLst/>
+          </a:prstGeom>
+        </p:spPr>
+      </p:pic>
+      <p:pic>
+        <p:nvPicPr>
+          <p:cNvPr id="9" name="Picture 8" descr="A graph of a gene count&#10;&#10;AI-generated content may be incorrect.">
+            <a:extLst>
+              <a:ext uri="{FF2B5EF4-FFF2-40B4-BE49-F238E27FC236}">
+                <a16:creationId xmlns:a16="http://schemas.microsoft.com/office/drawing/2014/main" id="{2DB73DBB-33BD-85AB-C351-98B139913120}"/>
+              </a:ext>
+            </a:extLst>
+          </p:cNvPr>
+          <p:cNvPicPr>
+            <a:picLocks noChangeAspect="1"/>
+          </p:cNvPicPr>
+          <p:nvPr/>
+        </p:nvPicPr>
+        <p:blipFill>
+          <a:blip r:embed="rId4"/>
+          <a:stretch>
+            <a:fillRect/>
+          </a:stretch>
+        </p:blipFill>
+        <p:spPr>
+          <a:xfrm>
+            <a:off x="6749610" y="3590859"/>
+            <a:ext cx="4585253" cy="2827245"/>
+          </a:xfrm>
+          <a:prstGeom prst="rect">
+            <a:avLst/>
+          </a:prstGeom>
+        </p:spPr>
+      </p:pic>
+    </p:spTree>
+    <p:extLst>
+      <p:ext uri="{BB962C8B-B14F-4D97-AF65-F5344CB8AC3E}">
+        <p14:creationId xmlns:p14="http://schemas.microsoft.com/office/powerpoint/2010/main" val="2602068393"/>
+      </p:ext>
+    </p:extLst>
+  </p:cSld>
+  <p:clrMapOvr>
+    <a:masterClrMapping/>
+  </p:clrMapOvr>
+  <mc:AlternateContent xmlns:mc="http://schemas.openxmlformats.org/markup-compatibility/2006" xmlns:p14="http://schemas.microsoft.com/office/powerpoint/2010/main">
+    <mc:Choice Requires="p14">
+      <p:transition spd="med" p14:dur="700">
+        <p:fade/>
+      </p:transition>
+    </mc:Choice>
+    <mc:Fallback xmlns="">
+      <p:transition spd="med">
+        <p:fade/>
+      </p:transition>
+    </mc:Fallback>
+  </mc:AlternateContent>
+</p:sld>
+</file>
+
 <file path=ppt/slides/slide2.xml><?xml version="1.0" encoding="utf-8"?>
 <p:sld xmlns:a="http://schemas.openxmlformats.org/drawingml/2006/main" xmlns:r="http://schemas.openxmlformats.org/officeDocument/2006/relationships" xmlns:p="http://schemas.openxmlformats.org/presentationml/2006/main">
   <p:cSld>
@@ -33275,6 +33687,41 @@
       </p:grpSpPr>
       <p:sp>
         <p:nvSpPr>
+          <p:cNvPr id="3" name="Title 2">
+            <a:extLst>
+              <a:ext uri="{FF2B5EF4-FFF2-40B4-BE49-F238E27FC236}">
+                <a16:creationId xmlns:a16="http://schemas.microsoft.com/office/drawing/2014/main" id="{AA380A81-DA4F-4A55-6CE5-6BD016167BCF}"/>
+              </a:ext>
+            </a:extLst>
+          </p:cNvPr>
+          <p:cNvSpPr>
+            <a:spLocks noGrp="1"/>
+          </p:cNvSpPr>
+          <p:nvPr>
+            <p:ph type="title"/>
+          </p:nvPr>
+        </p:nvSpPr>
+        <p:spPr>
+          <a:xfrm>
+            <a:off x="695325" y="763960"/>
+            <a:ext cx="9576000" cy="469056"/>
+          </a:xfrm>
+        </p:spPr>
+        <p:txBody>
+          <a:bodyPr anchor="ctr">
+            <a:normAutofit/>
+          </a:bodyPr>
+          <a:lstStyle/>
+          <a:p>
+            <a:r>
+              <a:rPr lang="en-US" sz="3200" dirty="0"/>
+              <a:t>Step 5: Processing and filtering of raw output </a:t>
+            </a:r>
+          </a:p>
+        </p:txBody>
+      </p:sp>
+      <p:sp>
+        <p:nvSpPr>
           <p:cNvPr id="5" name="Slide Number Placeholder 4">
             <a:extLst>
               <a:ext uri="{FF2B5EF4-FFF2-40B4-BE49-F238E27FC236}">
@@ -33314,6 +33761,1780 @@
                 </a:spcAft>
               </a:pPr>
               <a:t>2</a:t>
+            </a:fld>
+            <a:endParaRPr lang="en-AU" sz="700"/>
+          </a:p>
+        </p:txBody>
+      </p:sp>
+      <p:graphicFrame>
+        <p:nvGraphicFramePr>
+          <p:cNvPr id="7" name="Content Placeholder 6">
+            <a:extLst>
+              <a:ext uri="{FF2B5EF4-FFF2-40B4-BE49-F238E27FC236}">
+                <a16:creationId xmlns:a16="http://schemas.microsoft.com/office/drawing/2014/main" id="{B7F6E336-F364-07BD-FBA7-6195938AD0BC}"/>
+              </a:ext>
+            </a:extLst>
+          </p:cNvPr>
+          <p:cNvGraphicFramePr>
+            <a:graphicFrameLocks noGrp="1"/>
+          </p:cNvGraphicFramePr>
+          <p:nvPr>
+            <p:ph sz="quarter" idx="10"/>
+            <p:extLst>
+              <p:ext uri="{D42A27DB-BD31-4B8C-83A1-F6EECF244321}">
+                <p14:modId xmlns:p14="http://schemas.microsoft.com/office/powerpoint/2010/main" val="918561814"/>
+              </p:ext>
+            </p:extLst>
+          </p:nvPr>
+        </p:nvGraphicFramePr>
+        <p:xfrm>
+          <a:off x="838200" y="1825821"/>
+          <a:ext cx="10045800" cy="4556760"/>
+        </p:xfrm>
+        <a:graphic>
+          <a:graphicData uri="http://schemas.openxmlformats.org/drawingml/2006/table">
+            <a:tbl>
+              <a:tblPr firstRow="1" bandRow="1">
+                <a:tableStyleId>{69CF1AB2-1976-4502-BF36-3FF5EA218861}</a:tableStyleId>
+              </a:tblPr>
+              <a:tblGrid>
+                <a:gridCol w="1674300">
+                  <a:extLst>
+                    <a:ext uri="{9D8B030D-6E8A-4147-A177-3AD203B41FA5}">
+                      <a16:colId xmlns:a16="http://schemas.microsoft.com/office/drawing/2014/main" val="3490487315"/>
+                    </a:ext>
+                  </a:extLst>
+                </a:gridCol>
+                <a:gridCol w="1674300">
+                  <a:extLst>
+                    <a:ext uri="{9D8B030D-6E8A-4147-A177-3AD203B41FA5}">
+                      <a16:colId xmlns:a16="http://schemas.microsoft.com/office/drawing/2014/main" val="3911209021"/>
+                    </a:ext>
+                  </a:extLst>
+                </a:gridCol>
+                <a:gridCol w="1714164">
+                  <a:extLst>
+                    <a:ext uri="{9D8B030D-6E8A-4147-A177-3AD203B41FA5}">
+                      <a16:colId xmlns:a16="http://schemas.microsoft.com/office/drawing/2014/main" val="2625023382"/>
+                    </a:ext>
+                  </a:extLst>
+                </a:gridCol>
+                <a:gridCol w="1634436">
+                  <a:extLst>
+                    <a:ext uri="{9D8B030D-6E8A-4147-A177-3AD203B41FA5}">
+                      <a16:colId xmlns:a16="http://schemas.microsoft.com/office/drawing/2014/main" val="2116932353"/>
+                    </a:ext>
+                  </a:extLst>
+                </a:gridCol>
+                <a:gridCol w="1674300">
+                  <a:extLst>
+                    <a:ext uri="{9D8B030D-6E8A-4147-A177-3AD203B41FA5}">
+                      <a16:colId xmlns:a16="http://schemas.microsoft.com/office/drawing/2014/main" val="2573983644"/>
+                    </a:ext>
+                  </a:extLst>
+                </a:gridCol>
+                <a:gridCol w="1674300">
+                  <a:extLst>
+                    <a:ext uri="{9D8B030D-6E8A-4147-A177-3AD203B41FA5}">
+                      <a16:colId xmlns:a16="http://schemas.microsoft.com/office/drawing/2014/main" val="2204129861"/>
+                    </a:ext>
+                  </a:extLst>
+                </a:gridCol>
+              </a:tblGrid>
+              <a:tr h="370840">
+                <a:tc>
+                  <a:txBody>
+                    <a:bodyPr/>
+                    <a:lstStyle/>
+                    <a:p>
+                      <a:endParaRPr lang="en-US" sz="1400" b="0" dirty="0"/>
+                    </a:p>
+                  </a:txBody>
+                  <a:tcPr/>
+                </a:tc>
+                <a:tc>
+                  <a:txBody>
+                    <a:bodyPr/>
+                    <a:lstStyle/>
+                    <a:p>
+                      <a:r>
+                        <a:rPr lang="en-US" sz="1400" b="0" dirty="0" err="1"/>
+                        <a:t>raw_output</a:t>
+                      </a:r>
+                      <a:endParaRPr lang="en-US" sz="1400" b="0" dirty="0"/>
+                    </a:p>
+                  </a:txBody>
+                  <a:tcPr/>
+                </a:tc>
+                <a:tc>
+                  <a:txBody>
+                    <a:bodyPr/>
+                    <a:lstStyle/>
+                    <a:p>
+                      <a:r>
+                        <a:rPr lang="en-US" sz="1400" b="0" dirty="0" err="1"/>
+                        <a:t>filtered_output</a:t>
+                      </a:r>
+                      <a:r>
+                        <a:rPr lang="en-US" sz="1400" b="0" dirty="0"/>
+                        <a:t> </a:t>
+                      </a:r>
+                    </a:p>
+                  </a:txBody>
+                  <a:tcPr/>
+                </a:tc>
+                <a:tc>
+                  <a:txBody>
+                    <a:bodyPr/>
+                    <a:lstStyle/>
+                    <a:p>
+                      <a:r>
+                        <a:rPr lang="en-US" sz="1400" b="0" dirty="0" err="1"/>
+                        <a:t>filtered_output</a:t>
+                      </a:r>
+                      <a:r>
+                        <a:rPr lang="en-US" sz="1400" b="0" dirty="0"/>
+                        <a:t> (align_2000)</a:t>
+                      </a:r>
+                    </a:p>
+                  </a:txBody>
+                  <a:tcPr/>
+                </a:tc>
+                <a:tc>
+                  <a:txBody>
+                    <a:bodyPr/>
+                    <a:lstStyle/>
+                    <a:p>
+                      <a:pPr marL="0" marR="0" lvl="0" indent="0" algn="l" defTabSz="914400" rtl="0" eaLnBrk="1" fontAlgn="auto" latinLnBrk="0" hangingPunct="1">
+                        <a:lnSpc>
+                          <a:spcPct val="100000"/>
+                        </a:lnSpc>
+                        <a:spcBef>
+                          <a:spcPts val="0"/>
+                        </a:spcBef>
+                        <a:spcAft>
+                          <a:spcPts val="0"/>
+                        </a:spcAft>
+                        <a:buClrTx/>
+                        <a:buSzTx/>
+                        <a:buFontTx/>
+                        <a:buNone/>
+                        <a:tabLst/>
+                        <a:defRPr/>
+                      </a:pPr>
+                      <a:r>
+                        <a:rPr lang="en-US" sz="1400" b="0" dirty="0" err="1"/>
+                        <a:t>filtered_output</a:t>
+                      </a:r>
+                      <a:r>
+                        <a:rPr lang="en-US" sz="1400" b="0" dirty="0"/>
+                        <a:t> (dist_190)</a:t>
+                      </a:r>
+                    </a:p>
+                  </a:txBody>
+                  <a:tcPr/>
+                </a:tc>
+                <a:tc>
+                  <a:txBody>
+                    <a:bodyPr/>
+                    <a:lstStyle/>
+                    <a:p>
+                      <a:pPr marL="0" marR="0" lvl="0" indent="0" algn="l" defTabSz="914400" rtl="0" eaLnBrk="1" fontAlgn="auto" latinLnBrk="0" hangingPunct="1">
+                        <a:lnSpc>
+                          <a:spcPct val="100000"/>
+                        </a:lnSpc>
+                        <a:spcBef>
+                          <a:spcPts val="0"/>
+                        </a:spcBef>
+                        <a:spcAft>
+                          <a:spcPts val="0"/>
+                        </a:spcAft>
+                        <a:buClrTx/>
+                        <a:buSzTx/>
+                        <a:buFontTx/>
+                        <a:buNone/>
+                        <a:tabLst/>
+                        <a:defRPr/>
+                      </a:pPr>
+                      <a:r>
+                        <a:rPr lang="en-US" sz="1400" b="0" dirty="0" err="1">
+                          <a:solidFill>
+                            <a:srgbClr val="FF0000"/>
+                          </a:solidFill>
+                        </a:rPr>
+                        <a:t>filtered_output</a:t>
+                      </a:r>
+                      <a:r>
+                        <a:rPr lang="en-US" sz="1400" b="0" dirty="0">
+                          <a:solidFill>
+                            <a:srgbClr val="FF0000"/>
+                          </a:solidFill>
+                        </a:rPr>
+                        <a:t> (dist_190 + align_2000)</a:t>
+                      </a:r>
+                    </a:p>
+                  </a:txBody>
+                  <a:tcPr/>
+                </a:tc>
+                <a:extLst>
+                  <a:ext uri="{0D108BD9-81ED-4DB2-BD59-A6C34878D82A}">
+                    <a16:rowId xmlns:a16="http://schemas.microsoft.com/office/drawing/2014/main" val="1010565767"/>
+                  </a:ext>
+                </a:extLst>
+              </a:tr>
+              <a:tr h="370840">
+                <a:tc>
+                  <a:txBody>
+                    <a:bodyPr/>
+                    <a:lstStyle/>
+                    <a:p>
+                      <a:r>
+                        <a:rPr lang="en-US" sz="1400" dirty="0" err="1"/>
+                        <a:t>min_seq_length</a:t>
+                      </a:r>
+                      <a:endParaRPr lang="en-US" sz="1400" dirty="0"/>
+                    </a:p>
+                  </a:txBody>
+                  <a:tcPr/>
+                </a:tc>
+                <a:tc>
+                  <a:txBody>
+                    <a:bodyPr/>
+                    <a:lstStyle/>
+                    <a:p>
+                      <a:endParaRPr lang="en-US" sz="1400" dirty="0"/>
+                    </a:p>
+                  </a:txBody>
+                  <a:tcPr/>
+                </a:tc>
+                <a:tc>
+                  <a:txBody>
+                    <a:bodyPr/>
+                    <a:lstStyle/>
+                    <a:p>
+                      <a:r>
+                        <a:rPr lang="en-US" sz="1400" dirty="0"/>
+                        <a:t>1200</a:t>
+                      </a:r>
+                    </a:p>
+                  </a:txBody>
+                  <a:tcPr/>
+                </a:tc>
+                <a:tc>
+                  <a:txBody>
+                    <a:bodyPr/>
+                    <a:lstStyle/>
+                    <a:p>
+                      <a:r>
+                        <a:rPr lang="en-US" sz="1400" dirty="0"/>
+                        <a:t>1200</a:t>
+                      </a:r>
+                    </a:p>
+                  </a:txBody>
+                  <a:tcPr/>
+                </a:tc>
+                <a:tc>
+                  <a:txBody>
+                    <a:bodyPr/>
+                    <a:lstStyle/>
+                    <a:p>
+                      <a:r>
+                        <a:rPr lang="en-US" sz="1400" dirty="0"/>
+                        <a:t>1200</a:t>
+                      </a:r>
+                    </a:p>
+                  </a:txBody>
+                  <a:tcPr/>
+                </a:tc>
+                <a:tc>
+                  <a:txBody>
+                    <a:bodyPr/>
+                    <a:lstStyle/>
+                    <a:p>
+                      <a:r>
+                        <a:rPr lang="en-US" sz="1400" dirty="0"/>
+                        <a:t>1200</a:t>
+                      </a:r>
+                    </a:p>
+                  </a:txBody>
+                  <a:tcPr/>
+                </a:tc>
+                <a:extLst>
+                  <a:ext uri="{0D108BD9-81ED-4DB2-BD59-A6C34878D82A}">
+                    <a16:rowId xmlns:a16="http://schemas.microsoft.com/office/drawing/2014/main" val="3806745169"/>
+                  </a:ext>
+                </a:extLst>
+              </a:tr>
+              <a:tr h="370840">
+                <a:tc>
+                  <a:txBody>
+                    <a:bodyPr/>
+                    <a:lstStyle/>
+                    <a:p>
+                      <a:r>
+                        <a:rPr lang="en-US" sz="1400" dirty="0" err="1"/>
+                        <a:t>min_align_score</a:t>
+                      </a:r>
+                      <a:endParaRPr lang="en-US" sz="1400" dirty="0"/>
+                    </a:p>
+                  </a:txBody>
+                  <a:tcPr/>
+                </a:tc>
+                <a:tc>
+                  <a:txBody>
+                    <a:bodyPr/>
+                    <a:lstStyle/>
+                    <a:p>
+                      <a:endParaRPr lang="en-US" sz="1400" dirty="0"/>
+                    </a:p>
+                  </a:txBody>
+                  <a:tcPr/>
+                </a:tc>
+                <a:tc>
+                  <a:txBody>
+                    <a:bodyPr/>
+                    <a:lstStyle/>
+                    <a:p>
+                      <a:r>
+                        <a:rPr lang="en-US" sz="1400" dirty="0"/>
+                        <a:t>-Inf</a:t>
+                      </a:r>
+                    </a:p>
+                  </a:txBody>
+                  <a:tcPr/>
+                </a:tc>
+                <a:tc>
+                  <a:txBody>
+                    <a:bodyPr/>
+                    <a:lstStyle/>
+                    <a:p>
+                      <a:r>
+                        <a:rPr lang="en-US" sz="1400" dirty="0"/>
+                        <a:t>-2000</a:t>
+                      </a:r>
+                    </a:p>
+                  </a:txBody>
+                  <a:tcPr/>
+                </a:tc>
+                <a:tc>
+                  <a:txBody>
+                    <a:bodyPr/>
+                    <a:lstStyle/>
+                    <a:p>
+                      <a:r>
+                        <a:rPr lang="en-US" sz="1400" dirty="0"/>
+                        <a:t>-Inf</a:t>
+                      </a:r>
+                    </a:p>
+                  </a:txBody>
+                  <a:tcPr/>
+                </a:tc>
+                <a:tc>
+                  <a:txBody>
+                    <a:bodyPr/>
+                    <a:lstStyle/>
+                    <a:p>
+                      <a:r>
+                        <a:rPr lang="en-US" sz="1400" dirty="0"/>
+                        <a:t>-2000</a:t>
+                      </a:r>
+                    </a:p>
+                  </a:txBody>
+                  <a:tcPr/>
+                </a:tc>
+                <a:extLst>
+                  <a:ext uri="{0D108BD9-81ED-4DB2-BD59-A6C34878D82A}">
+                    <a16:rowId xmlns:a16="http://schemas.microsoft.com/office/drawing/2014/main" val="3521766335"/>
+                  </a:ext>
+                </a:extLst>
+              </a:tr>
+              <a:tr h="370840">
+                <a:tc>
+                  <a:txBody>
+                    <a:bodyPr/>
+                    <a:lstStyle/>
+                    <a:p>
+                      <a:r>
+                        <a:rPr lang="en-US" sz="1400" dirty="0" err="1"/>
+                        <a:t>max_core_dist</a:t>
+                      </a:r>
+                      <a:endParaRPr lang="en-US" sz="1400" dirty="0"/>
+                    </a:p>
+                  </a:txBody>
+                  <a:tcPr/>
+                </a:tc>
+                <a:tc>
+                  <a:txBody>
+                    <a:bodyPr/>
+                    <a:lstStyle/>
+                    <a:p>
+                      <a:endParaRPr lang="en-US" sz="1400" dirty="0"/>
+                    </a:p>
+                  </a:txBody>
+                  <a:tcPr/>
+                </a:tc>
+                <a:tc>
+                  <a:txBody>
+                    <a:bodyPr/>
+                    <a:lstStyle/>
+                    <a:p>
+                      <a:r>
+                        <a:rPr lang="en-US" sz="1400" dirty="0"/>
+                        <a:t>220</a:t>
+                      </a:r>
+                    </a:p>
+                  </a:txBody>
+                  <a:tcPr/>
+                </a:tc>
+                <a:tc>
+                  <a:txBody>
+                    <a:bodyPr/>
+                    <a:lstStyle/>
+                    <a:p>
+                      <a:r>
+                        <a:rPr lang="en-US" sz="1400" dirty="0"/>
+                        <a:t>220</a:t>
+                      </a:r>
+                    </a:p>
+                  </a:txBody>
+                  <a:tcPr/>
+                </a:tc>
+                <a:tc>
+                  <a:txBody>
+                    <a:bodyPr/>
+                    <a:lstStyle/>
+                    <a:p>
+                      <a:r>
+                        <a:rPr lang="en-US" sz="1400" dirty="0"/>
+                        <a:t>190</a:t>
+                      </a:r>
+                    </a:p>
+                  </a:txBody>
+                  <a:tcPr/>
+                </a:tc>
+                <a:tc>
+                  <a:txBody>
+                    <a:bodyPr/>
+                    <a:lstStyle/>
+                    <a:p>
+                      <a:r>
+                        <a:rPr lang="en-US" sz="1400" dirty="0"/>
+                        <a:t>190</a:t>
+                      </a:r>
+                    </a:p>
+                  </a:txBody>
+                  <a:tcPr/>
+                </a:tc>
+                <a:extLst>
+                  <a:ext uri="{0D108BD9-81ED-4DB2-BD59-A6C34878D82A}">
+                    <a16:rowId xmlns:a16="http://schemas.microsoft.com/office/drawing/2014/main" val="4145368956"/>
+                  </a:ext>
+                </a:extLst>
+              </a:tr>
+              <a:tr h="370840">
+                <a:tc>
+                  <a:txBody>
+                    <a:bodyPr/>
+                    <a:lstStyle/>
+                    <a:p>
+                      <a:r>
+                        <a:rPr lang="en-US" sz="1400" dirty="0"/>
+                        <a:t>Total number of rows</a:t>
+                      </a:r>
+                    </a:p>
+                  </a:txBody>
+                  <a:tcPr/>
+                </a:tc>
+                <a:tc>
+                  <a:txBody>
+                    <a:bodyPr/>
+                    <a:lstStyle/>
+                    <a:p>
+                      <a:r>
+                        <a:rPr lang="en-US" sz="1400" dirty="0"/>
+                        <a:t>697748</a:t>
+                      </a:r>
+                    </a:p>
+                  </a:txBody>
+                  <a:tcPr/>
+                </a:tc>
+                <a:tc>
+                  <a:txBody>
+                    <a:bodyPr/>
+                    <a:lstStyle/>
+                    <a:p>
+                      <a:r>
+                        <a:rPr lang="en-US" sz="1400" dirty="0"/>
+                        <a:t>145477</a:t>
+                      </a:r>
+                    </a:p>
+                  </a:txBody>
+                  <a:tcPr/>
+                </a:tc>
+                <a:tc>
+                  <a:txBody>
+                    <a:bodyPr/>
+                    <a:lstStyle/>
+                    <a:p>
+                      <a:r>
+                        <a:rPr lang="en-US" sz="1400" dirty="0"/>
+                        <a:t>126834</a:t>
+                      </a:r>
+                    </a:p>
+                  </a:txBody>
+                  <a:tcPr/>
+                </a:tc>
+                <a:tc>
+                  <a:txBody>
+                    <a:bodyPr/>
+                    <a:lstStyle/>
+                    <a:p>
+                      <a:r>
+                        <a:rPr lang="en-US" sz="1400" dirty="0"/>
+                        <a:t>121472</a:t>
+                      </a:r>
+                    </a:p>
+                  </a:txBody>
+                  <a:tcPr/>
+                </a:tc>
+                <a:tc>
+                  <a:txBody>
+                    <a:bodyPr/>
+                    <a:lstStyle/>
+                    <a:p>
+                      <a:r>
+                        <a:rPr lang="en-US" sz="1400" dirty="0"/>
+                        <a:t>113787</a:t>
+                      </a:r>
+                    </a:p>
+                  </a:txBody>
+                  <a:tcPr/>
+                </a:tc>
+                <a:extLst>
+                  <a:ext uri="{0D108BD9-81ED-4DB2-BD59-A6C34878D82A}">
+                    <a16:rowId xmlns:a16="http://schemas.microsoft.com/office/drawing/2014/main" val="2610170165"/>
+                  </a:ext>
+                </a:extLst>
+              </a:tr>
+              <a:tr h="370840">
+                <a:tc>
+                  <a:txBody>
+                    <a:bodyPr/>
+                    <a:lstStyle/>
+                    <a:p>
+                      <a:r>
+                        <a:rPr lang="en-US" sz="1400" dirty="0"/>
+                        <a:t>Number of rows (contain NA values)</a:t>
+                      </a:r>
+                    </a:p>
+                  </a:txBody>
+                  <a:tcPr/>
+                </a:tc>
+                <a:tc>
+                  <a:txBody>
+                    <a:bodyPr/>
+                    <a:lstStyle/>
+                    <a:p>
+                      <a:r>
+                        <a:rPr lang="en-US" sz="1400" dirty="0"/>
+                        <a:t>52611 (</a:t>
+                      </a:r>
+                      <a:r>
+                        <a:rPr lang="en-US" sz="1400" dirty="0" err="1"/>
+                        <a:t>Nt_target</a:t>
+                      </a:r>
+                      <a:r>
+                        <a:rPr lang="en-US" sz="1400" dirty="0"/>
+                        <a:t>)</a:t>
+                      </a:r>
+                    </a:p>
+                  </a:txBody>
+                  <a:tcPr/>
+                </a:tc>
+                <a:tc>
+                  <a:txBody>
+                    <a:bodyPr/>
+                    <a:lstStyle/>
+                    <a:p>
+                      <a:endParaRPr lang="en-US" sz="1400" dirty="0"/>
+                    </a:p>
+                  </a:txBody>
+                  <a:tcPr/>
+                </a:tc>
+                <a:tc>
+                  <a:txBody>
+                    <a:bodyPr/>
+                    <a:lstStyle/>
+                    <a:p>
+                      <a:endParaRPr lang="en-US" sz="1400" dirty="0"/>
+                    </a:p>
+                  </a:txBody>
+                  <a:tcPr/>
+                </a:tc>
+                <a:tc>
+                  <a:txBody>
+                    <a:bodyPr/>
+                    <a:lstStyle/>
+                    <a:p>
+                      <a:endParaRPr lang="en-US" sz="1400" dirty="0"/>
+                    </a:p>
+                  </a:txBody>
+                  <a:tcPr/>
+                </a:tc>
+                <a:tc>
+                  <a:txBody>
+                    <a:bodyPr/>
+                    <a:lstStyle/>
+                    <a:p>
+                      <a:endParaRPr lang="en-US" sz="1400" dirty="0"/>
+                    </a:p>
+                  </a:txBody>
+                  <a:tcPr/>
+                </a:tc>
+                <a:extLst>
+                  <a:ext uri="{0D108BD9-81ED-4DB2-BD59-A6C34878D82A}">
+                    <a16:rowId xmlns:a16="http://schemas.microsoft.com/office/drawing/2014/main" val="4220676153"/>
+                  </a:ext>
+                </a:extLst>
+              </a:tr>
+              <a:tr h="370840">
+                <a:tc>
+                  <a:txBody>
+                    <a:bodyPr/>
+                    <a:lstStyle/>
+                    <a:p>
+                      <a:r>
+                        <a:rPr lang="en-US" sz="1400" dirty="0"/>
+                        <a:t>Number of distinct species</a:t>
+                      </a:r>
+                    </a:p>
+                  </a:txBody>
+                  <a:tcPr/>
+                </a:tc>
+                <a:tc>
+                  <a:txBody>
+                    <a:bodyPr/>
+                    <a:lstStyle/>
+                    <a:p>
+                      <a:r>
+                        <a:rPr lang="en-US" sz="1400" dirty="0"/>
+                        <a:t>17508</a:t>
+                      </a:r>
+                    </a:p>
+                  </a:txBody>
+                  <a:tcPr/>
+                </a:tc>
+                <a:tc>
+                  <a:txBody>
+                    <a:bodyPr/>
+                    <a:lstStyle/>
+                    <a:p>
+                      <a:r>
+                        <a:rPr lang="en-US" sz="1400" dirty="0"/>
+                        <a:t>16691</a:t>
+                      </a:r>
+                    </a:p>
+                  </a:txBody>
+                  <a:tcPr/>
+                </a:tc>
+                <a:tc>
+                  <a:txBody>
+                    <a:bodyPr/>
+                    <a:lstStyle/>
+                    <a:p>
+                      <a:r>
+                        <a:rPr lang="en-US" sz="1400" dirty="0"/>
+                        <a:t>14898</a:t>
+                      </a:r>
+                    </a:p>
+                  </a:txBody>
+                  <a:tcPr/>
+                </a:tc>
+                <a:tc>
+                  <a:txBody>
+                    <a:bodyPr/>
+                    <a:lstStyle/>
+                    <a:p>
+                      <a:r>
+                        <a:rPr lang="en-US" sz="1400" dirty="0"/>
+                        <a:t>13979</a:t>
+                      </a:r>
+                    </a:p>
+                  </a:txBody>
+                  <a:tcPr/>
+                </a:tc>
+                <a:tc>
+                  <a:txBody>
+                    <a:bodyPr/>
+                    <a:lstStyle/>
+                    <a:p>
+                      <a:r>
+                        <a:rPr lang="en-US" sz="1400" dirty="0"/>
+                        <a:t>13116</a:t>
+                      </a:r>
+                    </a:p>
+                  </a:txBody>
+                  <a:tcPr/>
+                </a:tc>
+                <a:extLst>
+                  <a:ext uri="{0D108BD9-81ED-4DB2-BD59-A6C34878D82A}">
+                    <a16:rowId xmlns:a16="http://schemas.microsoft.com/office/drawing/2014/main" val="430336469"/>
+                  </a:ext>
+                </a:extLst>
+              </a:tr>
+              <a:tr h="370840">
+                <a:tc>
+                  <a:txBody>
+                    <a:bodyPr/>
+                    <a:lstStyle/>
+                    <a:p>
+                      <a:r>
+                        <a:rPr lang="en-US" sz="1400" dirty="0"/>
+                        <a:t>Number of genomes with more than one </a:t>
+                      </a:r>
+                      <a:r>
+                        <a:rPr lang="en-US" sz="1400" dirty="0" err="1"/>
+                        <a:t>rrs</a:t>
+                      </a:r>
+                      <a:r>
+                        <a:rPr lang="en-US" sz="1400" dirty="0"/>
+                        <a:t> sequence</a:t>
+                      </a:r>
+                    </a:p>
+                  </a:txBody>
+                  <a:tcPr/>
+                </a:tc>
+                <a:tc>
+                  <a:txBody>
+                    <a:bodyPr/>
+                    <a:lstStyle/>
+                    <a:p>
+                      <a:r>
+                        <a:rPr lang="en-US" sz="1400" dirty="0"/>
+                        <a:t>6821</a:t>
+                      </a:r>
+                    </a:p>
+                  </a:txBody>
+                  <a:tcPr/>
+                </a:tc>
+                <a:tc>
+                  <a:txBody>
+                    <a:bodyPr/>
+                    <a:lstStyle/>
+                    <a:p>
+                      <a:r>
+                        <a:rPr lang="en-US" sz="1400" dirty="0"/>
+                        <a:t>6553</a:t>
+                      </a:r>
+                    </a:p>
+                  </a:txBody>
+                  <a:tcPr/>
+                </a:tc>
+                <a:tc>
+                  <a:txBody>
+                    <a:bodyPr/>
+                    <a:lstStyle/>
+                    <a:p>
+                      <a:r>
+                        <a:rPr lang="en-US" sz="1400" dirty="0"/>
+                        <a:t>5730</a:t>
+                      </a:r>
+                    </a:p>
+                  </a:txBody>
+                  <a:tcPr/>
+                </a:tc>
+                <a:tc>
+                  <a:txBody>
+                    <a:bodyPr/>
+                    <a:lstStyle/>
+                    <a:p>
+                      <a:r>
+                        <a:rPr lang="en-US" sz="1400" dirty="0"/>
+                        <a:t>5494</a:t>
+                      </a:r>
+                    </a:p>
+                  </a:txBody>
+                  <a:tcPr/>
+                </a:tc>
+                <a:tc>
+                  <a:txBody>
+                    <a:bodyPr/>
+                    <a:lstStyle/>
+                    <a:p>
+                      <a:r>
+                        <a:rPr lang="en-US" sz="1400" dirty="0"/>
+                        <a:t>5115</a:t>
+                      </a:r>
+                    </a:p>
+                  </a:txBody>
+                  <a:tcPr/>
+                </a:tc>
+                <a:extLst>
+                  <a:ext uri="{0D108BD9-81ED-4DB2-BD59-A6C34878D82A}">
+                    <a16:rowId xmlns:a16="http://schemas.microsoft.com/office/drawing/2014/main" val="3162938583"/>
+                  </a:ext>
+                </a:extLst>
+              </a:tr>
+            </a:tbl>
+          </a:graphicData>
+        </a:graphic>
+      </p:graphicFrame>
+      <p:sp>
+        <p:nvSpPr>
+          <p:cNvPr id="22" name="TextBox 21">
+            <a:extLst>
+              <a:ext uri="{FF2B5EF4-FFF2-40B4-BE49-F238E27FC236}">
+                <a16:creationId xmlns:a16="http://schemas.microsoft.com/office/drawing/2014/main" id="{260C915E-945F-4A13-D2E6-79690CCB37B6}"/>
+              </a:ext>
+            </a:extLst>
+          </p:cNvPr>
+          <p:cNvSpPr txBox="1"/>
+          <p:nvPr/>
+        </p:nvSpPr>
+        <p:spPr>
+          <a:xfrm>
+            <a:off x="829340" y="1375530"/>
+            <a:ext cx="2636697" cy="307777"/>
+          </a:xfrm>
+          <a:prstGeom prst="rect">
+            <a:avLst/>
+          </a:prstGeom>
+          <a:noFill/>
+        </p:spPr>
+        <p:txBody>
+          <a:bodyPr wrap="square">
+            <a:spAutoFit/>
+          </a:bodyPr>
+          <a:lstStyle/>
+          <a:p>
+            <a:r>
+              <a:rPr lang="en-US" sz="1400" dirty="0" err="1">
+                <a:solidFill>
+                  <a:schemeClr val="accent1"/>
+                </a:solidFill>
+              </a:rPr>
+              <a:t>Selected_sequence</a:t>
+            </a:r>
+            <a:r>
+              <a:rPr lang="en-US" sz="1400" dirty="0">
+                <a:solidFill>
+                  <a:schemeClr val="accent1"/>
+                </a:solidFill>
+              </a:rPr>
+              <a:t>: 510-920</a:t>
+            </a:r>
+          </a:p>
+        </p:txBody>
+      </p:sp>
+    </p:spTree>
+    <p:extLst>
+      <p:ext uri="{BB962C8B-B14F-4D97-AF65-F5344CB8AC3E}">
+        <p14:creationId xmlns:p14="http://schemas.microsoft.com/office/powerpoint/2010/main" val="3673916018"/>
+      </p:ext>
+    </p:extLst>
+  </p:cSld>
+  <p:clrMapOvr>
+    <a:masterClrMapping/>
+  </p:clrMapOvr>
+  <mc:AlternateContent xmlns:mc="http://schemas.openxmlformats.org/markup-compatibility/2006" xmlns:p14="http://schemas.microsoft.com/office/powerpoint/2010/main">
+    <mc:Choice Requires="p14">
+      <p:transition spd="med" p14:dur="700">
+        <p:fade/>
+      </p:transition>
+    </mc:Choice>
+    <mc:Fallback xmlns="">
+      <p:transition spd="med">
+        <p:fade/>
+      </p:transition>
+    </mc:Fallback>
+  </mc:AlternateContent>
+</p:sld>
+</file>
+
+<file path=ppt/slides/slide3.xml><?xml version="1.0" encoding="utf-8"?>
+<p:sld xmlns:a="http://schemas.openxmlformats.org/drawingml/2006/main" xmlns:r="http://schemas.openxmlformats.org/officeDocument/2006/relationships" xmlns:p="http://schemas.openxmlformats.org/presentationml/2006/main">
+  <p:cSld>
+    <p:spTree>
+      <p:nvGrpSpPr>
+        <p:cNvPr id="1" name=""/>
+        <p:cNvGrpSpPr/>
+        <p:nvPr/>
+      </p:nvGrpSpPr>
+      <p:grpSpPr>
+        <a:xfrm>
+          <a:off x="0" y="0"/>
+          <a:ext cx="0" cy="0"/>
+          <a:chOff x="0" y="0"/>
+          <a:chExt cx="0" cy="0"/>
+        </a:xfrm>
+      </p:grpSpPr>
+      <p:pic>
+        <p:nvPicPr>
+          <p:cNvPr id="7" name="Content Placeholder 6">
+            <a:extLst>
+              <a:ext uri="{FF2B5EF4-FFF2-40B4-BE49-F238E27FC236}">
+                <a16:creationId xmlns:a16="http://schemas.microsoft.com/office/drawing/2014/main" id="{C2CAAF16-9DEE-583F-423A-96E2615C7682}"/>
+              </a:ext>
+            </a:extLst>
+          </p:cNvPr>
+          <p:cNvPicPr>
+            <a:picLocks noGrp="1" noChangeAspect="1"/>
+          </p:cNvPicPr>
+          <p:nvPr>
+            <p:ph sz="quarter" idx="10"/>
+          </p:nvPr>
+        </p:nvPicPr>
+        <p:blipFill>
+          <a:blip r:embed="rId2"/>
+          <a:stretch>
+            <a:fillRect/>
+          </a:stretch>
+        </p:blipFill>
+        <p:spPr>
+          <a:xfrm>
+            <a:off x="1295400" y="1905000"/>
+            <a:ext cx="9144000" cy="3657600"/>
+          </a:xfrm>
+        </p:spPr>
+      </p:pic>
+      <p:sp>
+        <p:nvSpPr>
+          <p:cNvPr id="3" name="Title 2">
+            <a:extLst>
+              <a:ext uri="{FF2B5EF4-FFF2-40B4-BE49-F238E27FC236}">
+                <a16:creationId xmlns:a16="http://schemas.microsoft.com/office/drawing/2014/main" id="{AB4E3AFF-C2CE-66FD-F81A-D015891BCB21}"/>
+              </a:ext>
+            </a:extLst>
+          </p:cNvPr>
+          <p:cNvSpPr>
+            <a:spLocks noGrp="1"/>
+          </p:cNvSpPr>
+          <p:nvPr>
+            <p:ph type="title"/>
+          </p:nvPr>
+        </p:nvSpPr>
+        <p:spPr/>
+        <p:txBody>
+          <a:bodyPr/>
+          <a:lstStyle/>
+          <a:p>
+            <a:endParaRPr lang="en-US"/>
+          </a:p>
+        </p:txBody>
+      </p:sp>
+      <p:sp>
+        <p:nvSpPr>
+          <p:cNvPr id="4" name="Footer Placeholder 3">
+            <a:extLst>
+              <a:ext uri="{FF2B5EF4-FFF2-40B4-BE49-F238E27FC236}">
+                <a16:creationId xmlns:a16="http://schemas.microsoft.com/office/drawing/2014/main" id="{23EF0F0A-4AF5-B02C-D538-683BB365E89A}"/>
+              </a:ext>
+            </a:extLst>
+          </p:cNvPr>
+          <p:cNvSpPr>
+            <a:spLocks noGrp="1"/>
+          </p:cNvSpPr>
+          <p:nvPr>
+            <p:ph type="ftr" sz="quarter" idx="17"/>
+          </p:nvPr>
+        </p:nvSpPr>
+        <p:spPr/>
+        <p:txBody>
+          <a:bodyPr/>
+          <a:lstStyle/>
+          <a:p>
+            <a:endParaRPr lang="en-AU" dirty="0"/>
+          </a:p>
+        </p:txBody>
+      </p:sp>
+      <p:sp>
+        <p:nvSpPr>
+          <p:cNvPr id="5" name="Slide Number Placeholder 4">
+            <a:extLst>
+              <a:ext uri="{FF2B5EF4-FFF2-40B4-BE49-F238E27FC236}">
+                <a16:creationId xmlns:a16="http://schemas.microsoft.com/office/drawing/2014/main" id="{A3B7EA5C-F538-9AD8-CC30-8A12BE81297F}"/>
+              </a:ext>
+            </a:extLst>
+          </p:cNvPr>
+          <p:cNvSpPr>
+            <a:spLocks noGrp="1"/>
+          </p:cNvSpPr>
+          <p:nvPr>
+            <p:ph type="sldNum" sz="quarter" idx="18"/>
+          </p:nvPr>
+        </p:nvSpPr>
+        <p:spPr/>
+        <p:txBody>
+          <a:bodyPr/>
+          <a:lstStyle/>
+          <a:p>
+            <a:fld id="{E917DE0E-AFB1-41FD-BC35-27DB61CA125F}" type="slidenum">
+              <a:rPr lang="en-AU" smtClean="0"/>
+              <a:pPr/>
+              <a:t>3</a:t>
+            </a:fld>
+            <a:endParaRPr lang="en-AU" dirty="0"/>
+          </a:p>
+        </p:txBody>
+      </p:sp>
+    </p:spTree>
+    <p:extLst>
+      <p:ext uri="{BB962C8B-B14F-4D97-AF65-F5344CB8AC3E}">
+        <p14:creationId xmlns:p14="http://schemas.microsoft.com/office/powerpoint/2010/main" val="2093052756"/>
+      </p:ext>
+    </p:extLst>
+  </p:cSld>
+  <p:clrMapOvr>
+    <a:masterClrMapping/>
+  </p:clrMapOvr>
+  <mc:AlternateContent xmlns:mc="http://schemas.openxmlformats.org/markup-compatibility/2006" xmlns:p14="http://schemas.microsoft.com/office/powerpoint/2010/main">
+    <mc:Choice Requires="p14">
+      <p:transition spd="med" p14:dur="700">
+        <p:fade/>
+      </p:transition>
+    </mc:Choice>
+    <mc:Fallback xmlns="">
+      <p:transition spd="med">
+        <p:fade/>
+      </p:transition>
+    </mc:Fallback>
+  </mc:AlternateContent>
+</p:sld>
+</file>
+
+<file path=ppt/slides/slide4.xml><?xml version="1.0" encoding="utf-8"?>
+<p:sld xmlns:a="http://schemas.openxmlformats.org/drawingml/2006/main" xmlns:r="http://schemas.openxmlformats.org/officeDocument/2006/relationships" xmlns:p="http://schemas.openxmlformats.org/presentationml/2006/main">
+  <p:cSld>
+    <p:spTree>
+      <p:nvGrpSpPr>
+        <p:cNvPr id="1" name=""/>
+        <p:cNvGrpSpPr/>
+        <p:nvPr/>
+      </p:nvGrpSpPr>
+      <p:grpSpPr>
+        <a:xfrm>
+          <a:off x="0" y="0"/>
+          <a:ext cx="0" cy="0"/>
+          <a:chOff x="0" y="0"/>
+          <a:chExt cx="0" cy="0"/>
+        </a:xfrm>
+      </p:grpSpPr>
+      <p:pic>
+        <p:nvPicPr>
+          <p:cNvPr id="7" name="Content Placeholder 6" descr="A screenshot of a computer&#10;&#10;AI-generated content may be incorrect.">
+            <a:extLst>
+              <a:ext uri="{FF2B5EF4-FFF2-40B4-BE49-F238E27FC236}">
+                <a16:creationId xmlns:a16="http://schemas.microsoft.com/office/drawing/2014/main" id="{754207F8-10E6-A857-4476-3712387F2CC8}"/>
+              </a:ext>
+            </a:extLst>
+          </p:cNvPr>
+          <p:cNvPicPr>
+            <a:picLocks noGrp="1" noChangeAspect="1"/>
+          </p:cNvPicPr>
+          <p:nvPr>
+            <p:ph sz="quarter" idx="10"/>
+          </p:nvPr>
+        </p:nvPicPr>
+        <p:blipFill>
+          <a:blip r:embed="rId2"/>
+          <a:srcRect r="11664"/>
+          <a:stretch>
+            <a:fillRect/>
+          </a:stretch>
+        </p:blipFill>
+        <p:spPr>
+          <a:xfrm>
+            <a:off x="629063" y="1602295"/>
+            <a:ext cx="5286403" cy="4142160"/>
+          </a:xfrm>
+        </p:spPr>
+      </p:pic>
+      <p:sp>
+        <p:nvSpPr>
+          <p:cNvPr id="3" name="Title 2">
+            <a:extLst>
+              <a:ext uri="{FF2B5EF4-FFF2-40B4-BE49-F238E27FC236}">
+                <a16:creationId xmlns:a16="http://schemas.microsoft.com/office/drawing/2014/main" id="{28FBFBCE-E744-81C0-366A-D3EFDA912FF2}"/>
+              </a:ext>
+            </a:extLst>
+          </p:cNvPr>
+          <p:cNvSpPr>
+            <a:spLocks noGrp="1"/>
+          </p:cNvSpPr>
+          <p:nvPr>
+            <p:ph type="title"/>
+          </p:nvPr>
+        </p:nvSpPr>
+        <p:spPr/>
+        <p:txBody>
+          <a:bodyPr/>
+          <a:lstStyle/>
+          <a:p>
+            <a:r>
+              <a:rPr lang="en-US" dirty="0"/>
+              <a:t>Summary</a:t>
+            </a:r>
+          </a:p>
+        </p:txBody>
+      </p:sp>
+      <p:sp>
+        <p:nvSpPr>
+          <p:cNvPr id="4" name="Footer Placeholder 3">
+            <a:extLst>
+              <a:ext uri="{FF2B5EF4-FFF2-40B4-BE49-F238E27FC236}">
+                <a16:creationId xmlns:a16="http://schemas.microsoft.com/office/drawing/2014/main" id="{0F9A42C5-B6D9-2426-E1DB-DF5885916720}"/>
+              </a:ext>
+            </a:extLst>
+          </p:cNvPr>
+          <p:cNvSpPr>
+            <a:spLocks noGrp="1"/>
+          </p:cNvSpPr>
+          <p:nvPr>
+            <p:ph type="ftr" sz="quarter" idx="17"/>
+          </p:nvPr>
+        </p:nvSpPr>
+        <p:spPr/>
+        <p:txBody>
+          <a:bodyPr/>
+          <a:lstStyle/>
+          <a:p>
+            <a:endParaRPr lang="en-AU" dirty="0"/>
+          </a:p>
+        </p:txBody>
+      </p:sp>
+      <p:sp>
+        <p:nvSpPr>
+          <p:cNvPr id="5" name="Slide Number Placeholder 4">
+            <a:extLst>
+              <a:ext uri="{FF2B5EF4-FFF2-40B4-BE49-F238E27FC236}">
+                <a16:creationId xmlns:a16="http://schemas.microsoft.com/office/drawing/2014/main" id="{430612F1-B1EB-054A-42E8-1FFECD941F6B}"/>
+              </a:ext>
+            </a:extLst>
+          </p:cNvPr>
+          <p:cNvSpPr>
+            <a:spLocks noGrp="1"/>
+          </p:cNvSpPr>
+          <p:nvPr>
+            <p:ph type="sldNum" sz="quarter" idx="18"/>
+          </p:nvPr>
+        </p:nvSpPr>
+        <p:spPr/>
+        <p:txBody>
+          <a:bodyPr/>
+          <a:lstStyle/>
+          <a:p>
+            <a:fld id="{E917DE0E-AFB1-41FD-BC35-27DB61CA125F}" type="slidenum">
+              <a:rPr lang="en-AU" smtClean="0"/>
+              <a:pPr/>
+              <a:t>4</a:t>
+            </a:fld>
+            <a:endParaRPr lang="en-AU" dirty="0"/>
+          </a:p>
+        </p:txBody>
+      </p:sp>
+      <p:pic>
+        <p:nvPicPr>
+          <p:cNvPr id="9" name="Picture 8" descr="A screenshot of a computer&#10;&#10;AI-generated content may be incorrect.">
+            <a:extLst>
+              <a:ext uri="{FF2B5EF4-FFF2-40B4-BE49-F238E27FC236}">
+                <a16:creationId xmlns:a16="http://schemas.microsoft.com/office/drawing/2014/main" id="{DBA1BEDA-35F1-7C75-DB42-943AA4BE9E67}"/>
+              </a:ext>
+            </a:extLst>
+          </p:cNvPr>
+          <p:cNvPicPr>
+            <a:picLocks noChangeAspect="1"/>
+          </p:cNvPicPr>
+          <p:nvPr/>
+        </p:nvPicPr>
+        <p:blipFill>
+          <a:blip r:embed="rId3"/>
+          <a:srcRect r="3780"/>
+          <a:stretch>
+            <a:fillRect/>
+          </a:stretch>
+        </p:blipFill>
+        <p:spPr>
+          <a:xfrm>
+            <a:off x="6096000" y="2462172"/>
+            <a:ext cx="5559932" cy="2382828"/>
+          </a:xfrm>
+          <a:prstGeom prst="rect">
+            <a:avLst/>
+          </a:prstGeom>
+        </p:spPr>
+      </p:pic>
+    </p:spTree>
+    <p:extLst>
+      <p:ext uri="{BB962C8B-B14F-4D97-AF65-F5344CB8AC3E}">
+        <p14:creationId xmlns:p14="http://schemas.microsoft.com/office/powerpoint/2010/main" val="3133224465"/>
+      </p:ext>
+    </p:extLst>
+  </p:cSld>
+  <p:clrMapOvr>
+    <a:masterClrMapping/>
+  </p:clrMapOvr>
+  <mc:AlternateContent xmlns:mc="http://schemas.openxmlformats.org/markup-compatibility/2006" xmlns:p14="http://schemas.microsoft.com/office/powerpoint/2010/main">
+    <mc:Choice Requires="p14">
+      <p:transition spd="med" p14:dur="700">
+        <p:fade/>
+      </p:transition>
+    </mc:Choice>
+    <mc:Fallback xmlns="">
+      <p:transition spd="med">
+        <p:fade/>
+      </p:transition>
+    </mc:Fallback>
+  </mc:AlternateContent>
+</p:sld>
+</file>
+
+<file path=ppt/slides/slide5.xml><?xml version="1.0" encoding="utf-8"?>
+<p:sld xmlns:a="http://schemas.openxmlformats.org/drawingml/2006/main" xmlns:r="http://schemas.openxmlformats.org/officeDocument/2006/relationships" xmlns:p="http://schemas.openxmlformats.org/presentationml/2006/main">
+  <p:cSld>
+    <p:spTree>
+      <p:nvGrpSpPr>
+        <p:cNvPr id="1" name=""/>
+        <p:cNvGrpSpPr/>
+        <p:nvPr/>
+      </p:nvGrpSpPr>
+      <p:grpSpPr>
+        <a:xfrm>
+          <a:off x="0" y="0"/>
+          <a:ext cx="0" cy="0"/>
+          <a:chOff x="0" y="0"/>
+          <a:chExt cx="0" cy="0"/>
+        </a:xfrm>
+      </p:grpSpPr>
+      <p:pic>
+        <p:nvPicPr>
+          <p:cNvPr id="7" name="Content Placeholder 6">
+            <a:extLst>
+              <a:ext uri="{FF2B5EF4-FFF2-40B4-BE49-F238E27FC236}">
+                <a16:creationId xmlns:a16="http://schemas.microsoft.com/office/drawing/2014/main" id="{D89E592F-46B9-4A76-8ED0-542788F894A4}"/>
+              </a:ext>
+            </a:extLst>
+          </p:cNvPr>
+          <p:cNvPicPr>
+            <a:picLocks noGrp="1" noChangeAspect="1"/>
+          </p:cNvPicPr>
+          <p:nvPr>
+            <p:ph sz="quarter" idx="10"/>
+          </p:nvPr>
+        </p:nvPicPr>
+        <p:blipFill>
+          <a:blip r:embed="rId2"/>
+          <a:stretch>
+            <a:fillRect/>
+          </a:stretch>
+        </p:blipFill>
+        <p:spPr>
+          <a:xfrm>
+            <a:off x="2000250" y="1449388"/>
+            <a:ext cx="6967537" cy="4645025"/>
+          </a:xfrm>
+        </p:spPr>
+      </p:pic>
+      <p:sp>
+        <p:nvSpPr>
+          <p:cNvPr id="3" name="Title 2">
+            <a:extLst>
+              <a:ext uri="{FF2B5EF4-FFF2-40B4-BE49-F238E27FC236}">
+                <a16:creationId xmlns:a16="http://schemas.microsoft.com/office/drawing/2014/main" id="{46E25887-A65A-2CC9-17DF-EF0A7695C797}"/>
+              </a:ext>
+            </a:extLst>
+          </p:cNvPr>
+          <p:cNvSpPr>
+            <a:spLocks noGrp="1"/>
+          </p:cNvSpPr>
+          <p:nvPr>
+            <p:ph type="title"/>
+          </p:nvPr>
+        </p:nvSpPr>
+        <p:spPr/>
+        <p:txBody>
+          <a:bodyPr/>
+          <a:lstStyle/>
+          <a:p>
+            <a:endParaRPr lang="en-US"/>
+          </a:p>
+        </p:txBody>
+      </p:sp>
+      <p:sp>
+        <p:nvSpPr>
+          <p:cNvPr id="4" name="Footer Placeholder 3">
+            <a:extLst>
+              <a:ext uri="{FF2B5EF4-FFF2-40B4-BE49-F238E27FC236}">
+                <a16:creationId xmlns:a16="http://schemas.microsoft.com/office/drawing/2014/main" id="{1028CC96-1FA5-0311-9EAB-3D5BAD411515}"/>
+              </a:ext>
+            </a:extLst>
+          </p:cNvPr>
+          <p:cNvSpPr>
+            <a:spLocks noGrp="1"/>
+          </p:cNvSpPr>
+          <p:nvPr>
+            <p:ph type="ftr" sz="quarter" idx="17"/>
+          </p:nvPr>
+        </p:nvSpPr>
+        <p:spPr/>
+        <p:txBody>
+          <a:bodyPr/>
+          <a:lstStyle/>
+          <a:p>
+            <a:endParaRPr lang="en-AU" dirty="0"/>
+          </a:p>
+        </p:txBody>
+      </p:sp>
+      <p:sp>
+        <p:nvSpPr>
+          <p:cNvPr id="5" name="Slide Number Placeholder 4">
+            <a:extLst>
+              <a:ext uri="{FF2B5EF4-FFF2-40B4-BE49-F238E27FC236}">
+                <a16:creationId xmlns:a16="http://schemas.microsoft.com/office/drawing/2014/main" id="{14B3AC84-785C-DBAA-017A-A11DC3F562B3}"/>
+              </a:ext>
+            </a:extLst>
+          </p:cNvPr>
+          <p:cNvSpPr>
+            <a:spLocks noGrp="1"/>
+          </p:cNvSpPr>
+          <p:nvPr>
+            <p:ph type="sldNum" sz="quarter" idx="18"/>
+          </p:nvPr>
+        </p:nvSpPr>
+        <p:spPr/>
+        <p:txBody>
+          <a:bodyPr/>
+          <a:lstStyle/>
+          <a:p>
+            <a:fld id="{E917DE0E-AFB1-41FD-BC35-27DB61CA125F}" type="slidenum">
+              <a:rPr lang="en-AU" smtClean="0"/>
+              <a:pPr/>
+              <a:t>5</a:t>
+            </a:fld>
+            <a:endParaRPr lang="en-AU" dirty="0"/>
+          </a:p>
+        </p:txBody>
+      </p:sp>
+    </p:spTree>
+    <p:extLst>
+      <p:ext uri="{BB962C8B-B14F-4D97-AF65-F5344CB8AC3E}">
+        <p14:creationId xmlns:p14="http://schemas.microsoft.com/office/powerpoint/2010/main" val="1803220806"/>
+      </p:ext>
+    </p:extLst>
+  </p:cSld>
+  <p:clrMapOvr>
+    <a:masterClrMapping/>
+  </p:clrMapOvr>
+  <mc:AlternateContent xmlns:mc="http://schemas.openxmlformats.org/markup-compatibility/2006" xmlns:p14="http://schemas.microsoft.com/office/powerpoint/2010/main">
+    <mc:Choice Requires="p14">
+      <p:transition spd="med" p14:dur="700">
+        <p:fade/>
+      </p:transition>
+    </mc:Choice>
+    <mc:Fallback xmlns="">
+      <p:transition spd="med">
+        <p:fade/>
+      </p:transition>
+    </mc:Fallback>
+  </mc:AlternateContent>
+</p:sld>
+</file>
+
+<file path=ppt/slides/slide6.xml><?xml version="1.0" encoding="utf-8"?>
+<p:sld xmlns:a="http://schemas.openxmlformats.org/drawingml/2006/main" xmlns:r="http://schemas.openxmlformats.org/officeDocument/2006/relationships" xmlns:p="http://schemas.openxmlformats.org/presentationml/2006/main">
+  <p:cSld>
+    <p:spTree>
+      <p:nvGrpSpPr>
+        <p:cNvPr id="1" name=""/>
+        <p:cNvGrpSpPr/>
+        <p:nvPr/>
+      </p:nvGrpSpPr>
+      <p:grpSpPr>
+        <a:xfrm>
+          <a:off x="0" y="0"/>
+          <a:ext cx="0" cy="0"/>
+          <a:chOff x="0" y="0"/>
+          <a:chExt cx="0" cy="0"/>
+        </a:xfrm>
+      </p:grpSpPr>
+      <p:pic>
+        <p:nvPicPr>
+          <p:cNvPr id="7" name="Content Placeholder 6">
+            <a:extLst>
+              <a:ext uri="{FF2B5EF4-FFF2-40B4-BE49-F238E27FC236}">
+                <a16:creationId xmlns:a16="http://schemas.microsoft.com/office/drawing/2014/main" id="{5B662688-CF95-C00F-54EE-96AC71EB82BA}"/>
+              </a:ext>
+            </a:extLst>
+          </p:cNvPr>
+          <p:cNvPicPr>
+            <a:picLocks noGrp="1" noChangeAspect="1"/>
+          </p:cNvPicPr>
+          <p:nvPr>
+            <p:ph sz="quarter" idx="10"/>
+          </p:nvPr>
+        </p:nvPicPr>
+        <p:blipFill>
+          <a:blip r:embed="rId2"/>
+          <a:stretch>
+            <a:fillRect/>
+          </a:stretch>
+        </p:blipFill>
+        <p:spPr>
+          <a:xfrm>
+            <a:off x="3161506" y="1449388"/>
+            <a:ext cx="4645025" cy="4645025"/>
+          </a:xfrm>
+        </p:spPr>
+      </p:pic>
+      <p:sp>
+        <p:nvSpPr>
+          <p:cNvPr id="3" name="Title 2">
+            <a:extLst>
+              <a:ext uri="{FF2B5EF4-FFF2-40B4-BE49-F238E27FC236}">
+                <a16:creationId xmlns:a16="http://schemas.microsoft.com/office/drawing/2014/main" id="{D6FEBD5F-0B2B-0D21-E8BA-68876B211339}"/>
+              </a:ext>
+            </a:extLst>
+          </p:cNvPr>
+          <p:cNvSpPr>
+            <a:spLocks noGrp="1"/>
+          </p:cNvSpPr>
+          <p:nvPr>
+            <p:ph type="title"/>
+          </p:nvPr>
+        </p:nvSpPr>
+        <p:spPr/>
+        <p:txBody>
+          <a:bodyPr/>
+          <a:lstStyle/>
+          <a:p>
+            <a:endParaRPr lang="en-US"/>
+          </a:p>
+        </p:txBody>
+      </p:sp>
+      <p:sp>
+        <p:nvSpPr>
+          <p:cNvPr id="4" name="Footer Placeholder 3">
+            <a:extLst>
+              <a:ext uri="{FF2B5EF4-FFF2-40B4-BE49-F238E27FC236}">
+                <a16:creationId xmlns:a16="http://schemas.microsoft.com/office/drawing/2014/main" id="{EEF452CB-4F3B-818D-D0F5-F2560DBFCCEE}"/>
+              </a:ext>
+            </a:extLst>
+          </p:cNvPr>
+          <p:cNvSpPr>
+            <a:spLocks noGrp="1"/>
+          </p:cNvSpPr>
+          <p:nvPr>
+            <p:ph type="ftr" sz="quarter" idx="17"/>
+          </p:nvPr>
+        </p:nvSpPr>
+        <p:spPr/>
+        <p:txBody>
+          <a:bodyPr/>
+          <a:lstStyle/>
+          <a:p>
+            <a:endParaRPr lang="en-AU" dirty="0"/>
+          </a:p>
+        </p:txBody>
+      </p:sp>
+      <p:sp>
+        <p:nvSpPr>
+          <p:cNvPr id="5" name="Slide Number Placeholder 4">
+            <a:extLst>
+              <a:ext uri="{FF2B5EF4-FFF2-40B4-BE49-F238E27FC236}">
+                <a16:creationId xmlns:a16="http://schemas.microsoft.com/office/drawing/2014/main" id="{BB739E17-BC9B-F9F5-641E-F8A972EA2405}"/>
+              </a:ext>
+            </a:extLst>
+          </p:cNvPr>
+          <p:cNvSpPr>
+            <a:spLocks noGrp="1"/>
+          </p:cNvSpPr>
+          <p:nvPr>
+            <p:ph type="sldNum" sz="quarter" idx="18"/>
+          </p:nvPr>
+        </p:nvSpPr>
+        <p:spPr/>
+        <p:txBody>
+          <a:bodyPr/>
+          <a:lstStyle/>
+          <a:p>
+            <a:fld id="{E917DE0E-AFB1-41FD-BC35-27DB61CA125F}" type="slidenum">
+              <a:rPr lang="en-AU" smtClean="0"/>
+              <a:pPr/>
+              <a:t>6</a:t>
+            </a:fld>
+            <a:endParaRPr lang="en-AU" dirty="0"/>
+          </a:p>
+        </p:txBody>
+      </p:sp>
+    </p:spTree>
+    <p:extLst>
+      <p:ext uri="{BB962C8B-B14F-4D97-AF65-F5344CB8AC3E}">
+        <p14:creationId xmlns:p14="http://schemas.microsoft.com/office/powerpoint/2010/main" val="1356601550"/>
+      </p:ext>
+    </p:extLst>
+  </p:cSld>
+  <p:clrMapOvr>
+    <a:masterClrMapping/>
+  </p:clrMapOvr>
+  <mc:AlternateContent xmlns:mc="http://schemas.openxmlformats.org/markup-compatibility/2006" xmlns:p14="http://schemas.microsoft.com/office/powerpoint/2010/main">
+    <mc:Choice Requires="p14">
+      <p:transition spd="med" p14:dur="700">
+        <p:fade/>
+      </p:transition>
+    </mc:Choice>
+    <mc:Fallback xmlns="">
+      <p:transition spd="med">
+        <p:fade/>
+      </p:transition>
+    </mc:Fallback>
+  </mc:AlternateContent>
+</p:sld>
+</file>
+
+<file path=ppt/slides/slide7.xml><?xml version="1.0" encoding="utf-8"?>
+<p:sld xmlns:a="http://schemas.openxmlformats.org/drawingml/2006/main" xmlns:r="http://schemas.openxmlformats.org/officeDocument/2006/relationships" xmlns:p="http://schemas.openxmlformats.org/presentationml/2006/main">
+  <p:cSld>
+    <p:spTree>
+      <p:nvGrpSpPr>
+        <p:cNvPr id="1" name=""/>
+        <p:cNvGrpSpPr/>
+        <p:nvPr/>
+      </p:nvGrpSpPr>
+      <p:grpSpPr>
+        <a:xfrm>
+          <a:off x="0" y="0"/>
+          <a:ext cx="0" cy="0"/>
+          <a:chOff x="0" y="0"/>
+          <a:chExt cx="0" cy="0"/>
+        </a:xfrm>
+      </p:grpSpPr>
+      <p:pic>
+        <p:nvPicPr>
+          <p:cNvPr id="7" name="Content Placeholder 6">
+            <a:extLst>
+              <a:ext uri="{FF2B5EF4-FFF2-40B4-BE49-F238E27FC236}">
+                <a16:creationId xmlns:a16="http://schemas.microsoft.com/office/drawing/2014/main" id="{E101A5CB-9B7D-0C6A-D658-160C17A563E5}"/>
+              </a:ext>
+            </a:extLst>
+          </p:cNvPr>
+          <p:cNvPicPr>
+            <a:picLocks noGrp="1" noChangeAspect="1"/>
+          </p:cNvPicPr>
+          <p:nvPr>
+            <p:ph sz="quarter" idx="10"/>
+          </p:nvPr>
+        </p:nvPicPr>
+        <p:blipFill>
+          <a:blip r:embed="rId2"/>
+          <a:stretch>
+            <a:fillRect/>
+          </a:stretch>
+        </p:blipFill>
+        <p:spPr>
+          <a:xfrm>
+            <a:off x="2525279" y="1062407"/>
+            <a:ext cx="8994358" cy="5139634"/>
+          </a:xfrm>
+        </p:spPr>
+      </p:pic>
+      <p:sp>
+        <p:nvSpPr>
+          <p:cNvPr id="3" name="Title 2">
+            <a:extLst>
+              <a:ext uri="{FF2B5EF4-FFF2-40B4-BE49-F238E27FC236}">
+                <a16:creationId xmlns:a16="http://schemas.microsoft.com/office/drawing/2014/main" id="{07BC5919-D567-3292-7FC2-9E8F01FC5934}"/>
+              </a:ext>
+            </a:extLst>
+          </p:cNvPr>
+          <p:cNvSpPr>
+            <a:spLocks noGrp="1"/>
+          </p:cNvSpPr>
+          <p:nvPr>
+            <p:ph type="title"/>
+          </p:nvPr>
+        </p:nvSpPr>
+        <p:spPr/>
+        <p:txBody>
+          <a:bodyPr/>
+          <a:lstStyle/>
+          <a:p>
+            <a:endParaRPr lang="en-US"/>
+          </a:p>
+        </p:txBody>
+      </p:sp>
+      <p:sp>
+        <p:nvSpPr>
+          <p:cNvPr id="4" name="Footer Placeholder 3">
+            <a:extLst>
+              <a:ext uri="{FF2B5EF4-FFF2-40B4-BE49-F238E27FC236}">
+                <a16:creationId xmlns:a16="http://schemas.microsoft.com/office/drawing/2014/main" id="{FCE32D1A-F84D-3C32-E2F9-555A330EB962}"/>
+              </a:ext>
+            </a:extLst>
+          </p:cNvPr>
+          <p:cNvSpPr>
+            <a:spLocks noGrp="1"/>
+          </p:cNvSpPr>
+          <p:nvPr>
+            <p:ph type="ftr" sz="quarter" idx="17"/>
+          </p:nvPr>
+        </p:nvSpPr>
+        <p:spPr/>
+        <p:txBody>
+          <a:bodyPr/>
+          <a:lstStyle/>
+          <a:p>
+            <a:endParaRPr lang="en-AU" dirty="0"/>
+          </a:p>
+        </p:txBody>
+      </p:sp>
+      <p:sp>
+        <p:nvSpPr>
+          <p:cNvPr id="5" name="Slide Number Placeholder 4">
+            <a:extLst>
+              <a:ext uri="{FF2B5EF4-FFF2-40B4-BE49-F238E27FC236}">
+                <a16:creationId xmlns:a16="http://schemas.microsoft.com/office/drawing/2014/main" id="{686D4ED7-47FC-7DC6-22CD-D46F2D47ACA3}"/>
+              </a:ext>
+            </a:extLst>
+          </p:cNvPr>
+          <p:cNvSpPr>
+            <a:spLocks noGrp="1"/>
+          </p:cNvSpPr>
+          <p:nvPr>
+            <p:ph type="sldNum" sz="quarter" idx="18"/>
+          </p:nvPr>
+        </p:nvSpPr>
+        <p:spPr/>
+        <p:txBody>
+          <a:bodyPr/>
+          <a:lstStyle/>
+          <a:p>
+            <a:fld id="{E917DE0E-AFB1-41FD-BC35-27DB61CA125F}" type="slidenum">
+              <a:rPr lang="en-AU" smtClean="0"/>
+              <a:pPr/>
+              <a:t>7</a:t>
+            </a:fld>
+            <a:endParaRPr lang="en-AU" dirty="0"/>
+          </a:p>
+        </p:txBody>
+      </p:sp>
+      <p:pic>
+        <p:nvPicPr>
+          <p:cNvPr id="9" name="Picture 8" descr="A diagram of a number&#10;&#10;AI-generated content may be incorrect.">
+            <a:extLst>
+              <a:ext uri="{FF2B5EF4-FFF2-40B4-BE49-F238E27FC236}">
+                <a16:creationId xmlns:a16="http://schemas.microsoft.com/office/drawing/2014/main" id="{4B5678CD-01F3-3F73-5D64-729C3EEE68D5}"/>
+              </a:ext>
+            </a:extLst>
+          </p:cNvPr>
+          <p:cNvPicPr>
+            <a:picLocks noChangeAspect="1"/>
+          </p:cNvPicPr>
+          <p:nvPr/>
+        </p:nvPicPr>
+        <p:blipFill>
+          <a:blip r:embed="rId3"/>
+          <a:stretch>
+            <a:fillRect/>
+          </a:stretch>
+        </p:blipFill>
+        <p:spPr>
+          <a:xfrm>
+            <a:off x="228600" y="2971800"/>
+            <a:ext cx="2270125" cy="1981200"/>
+          </a:xfrm>
+          <a:prstGeom prst="rect">
+            <a:avLst/>
+          </a:prstGeom>
+        </p:spPr>
+      </p:pic>
+    </p:spTree>
+    <p:extLst>
+      <p:ext uri="{BB962C8B-B14F-4D97-AF65-F5344CB8AC3E}">
+        <p14:creationId xmlns:p14="http://schemas.microsoft.com/office/powerpoint/2010/main" val="1491503297"/>
+      </p:ext>
+    </p:extLst>
+  </p:cSld>
+  <p:clrMapOvr>
+    <a:masterClrMapping/>
+  </p:clrMapOvr>
+  <mc:AlternateContent xmlns:mc="http://schemas.openxmlformats.org/markup-compatibility/2006" xmlns:p14="http://schemas.microsoft.com/office/powerpoint/2010/main">
+    <mc:Choice Requires="p14">
+      <p:transition spd="med" p14:dur="700">
+        <p:fade/>
+      </p:transition>
+    </mc:Choice>
+    <mc:Fallback xmlns="">
+      <p:transition spd="med">
+        <p:fade/>
+      </p:transition>
+    </mc:Fallback>
+  </mc:AlternateContent>
+</p:sld>
+</file>
+
+<file path=ppt/slides/slide8.xml><?xml version="1.0" encoding="utf-8"?>
+<p:sld xmlns:a="http://schemas.openxmlformats.org/drawingml/2006/main" xmlns:r="http://schemas.openxmlformats.org/officeDocument/2006/relationships" xmlns:p="http://schemas.openxmlformats.org/presentationml/2006/main">
+  <p:cSld>
+    <p:spTree>
+      <p:nvGrpSpPr>
+        <p:cNvPr id="1" name="">
+          <a:extLst>
+            <a:ext uri="{FF2B5EF4-FFF2-40B4-BE49-F238E27FC236}">
+              <a16:creationId xmlns:a16="http://schemas.microsoft.com/office/drawing/2014/main" id="{ABC759F5-87C6-537A-31A2-36A47799AB00}"/>
+            </a:ext>
+          </a:extLst>
+        </p:cNvPr>
+        <p:cNvGrpSpPr/>
+        <p:nvPr/>
+      </p:nvGrpSpPr>
+      <p:grpSpPr>
+        <a:xfrm>
+          <a:off x="0" y="0"/>
+          <a:ext cx="0" cy="0"/>
+          <a:chOff x="0" y="0"/>
+          <a:chExt cx="0" cy="0"/>
+        </a:xfrm>
+      </p:grpSpPr>
+      <p:sp>
+        <p:nvSpPr>
+          <p:cNvPr id="5" name="Slide Number Placeholder 4">
+            <a:extLst>
+              <a:ext uri="{FF2B5EF4-FFF2-40B4-BE49-F238E27FC236}">
+                <a16:creationId xmlns:a16="http://schemas.microsoft.com/office/drawing/2014/main" id="{B23CB40C-1CE6-8F35-B3C0-ECC04968296A}"/>
+              </a:ext>
+            </a:extLst>
+          </p:cNvPr>
+          <p:cNvSpPr>
+            <a:spLocks noGrp="1"/>
+          </p:cNvSpPr>
+          <p:nvPr>
+            <p:ph type="sldNum" sz="quarter" idx="18"/>
+          </p:nvPr>
+        </p:nvSpPr>
+        <p:spPr>
+          <a:xfrm>
+            <a:off x="11208568" y="6526800"/>
+            <a:ext cx="288032" cy="108000"/>
+          </a:xfrm>
+        </p:spPr>
+        <p:txBody>
+          <a:bodyPr anchor="ctr">
+            <a:normAutofit/>
+          </a:bodyPr>
+          <a:lstStyle/>
+          <a:p>
+            <a:pPr>
+              <a:spcAft>
+                <a:spcPts val="600"/>
+              </a:spcAft>
+            </a:pPr>
+            <a:fld id="{E917DE0E-AFB1-41FD-BC35-27DB61CA125F}" type="slidenum">
+              <a:rPr lang="en-AU" sz="700" smtClean="0"/>
+              <a:pPr>
+                <a:spcAft>
+                  <a:spcPts val="600"/>
+                </a:spcAft>
+              </a:pPr>
+              <a:t>8</a:t>
             </a:fld>
             <a:endParaRPr lang="en-AU" sz="700"/>
           </a:p>
@@ -33413,7 +35634,7 @@
 </p:sld>
 </file>
 
-<file path=ppt/slides/slide3.xml><?xml version="1.0" encoding="utf-8"?>
+<file path=ppt/slides/slide9.xml><?xml version="1.0" encoding="utf-8"?>
 <p:sld xmlns:a="http://schemas.openxmlformats.org/drawingml/2006/main" xmlns:r="http://schemas.openxmlformats.org/officeDocument/2006/relationships" xmlns:p="http://schemas.openxmlformats.org/presentationml/2006/main">
   <p:cSld>
     <p:spTree>
@@ -33476,7 +35697,7 @@
                   <a:spcPts val="600"/>
                 </a:spcAft>
               </a:pPr>
-              <a:t>3</a:t>
+              <a:t>9</a:t>
             </a:fld>
             <a:endParaRPr lang="en-AU" sz="700"/>
           </a:p>
@@ -33685,352 +35906,6 @@
     <p:extLst>
       <p:ext uri="{BB962C8B-B14F-4D97-AF65-F5344CB8AC3E}">
         <p14:creationId xmlns:p14="http://schemas.microsoft.com/office/powerpoint/2010/main" val="1791811891"/>
-      </p:ext>
-    </p:extLst>
-  </p:cSld>
-  <p:clrMapOvr>
-    <a:masterClrMapping/>
-  </p:clrMapOvr>
-  <mc:AlternateContent xmlns:mc="http://schemas.openxmlformats.org/markup-compatibility/2006" xmlns:p14="http://schemas.microsoft.com/office/powerpoint/2010/main">
-    <mc:Choice Requires="p14">
-      <p:transition spd="med" p14:dur="700">
-        <p:fade/>
-      </p:transition>
-    </mc:Choice>
-    <mc:Fallback xmlns="">
-      <p:transition spd="med">
-        <p:fade/>
-      </p:transition>
-    </mc:Fallback>
-  </mc:AlternateContent>
-</p:sld>
-</file>
-
-<file path=ppt/slides/slide4.xml><?xml version="1.0" encoding="utf-8"?>
-<p:sld xmlns:a="http://schemas.openxmlformats.org/drawingml/2006/main" xmlns:r="http://schemas.openxmlformats.org/officeDocument/2006/relationships" xmlns:p="http://schemas.openxmlformats.org/presentationml/2006/main">
-  <p:cSld>
-    <p:spTree>
-      <p:nvGrpSpPr>
-        <p:cNvPr id="1" name="">
-          <a:extLst>
-            <a:ext uri="{FF2B5EF4-FFF2-40B4-BE49-F238E27FC236}">
-              <a16:creationId xmlns:a16="http://schemas.microsoft.com/office/drawing/2014/main" id="{C370CD9C-7ABD-373E-1EA8-D37E31FFFF17}"/>
-            </a:ext>
-          </a:extLst>
-        </p:cNvPr>
-        <p:cNvGrpSpPr/>
-        <p:nvPr/>
-      </p:nvGrpSpPr>
-      <p:grpSpPr>
-        <a:xfrm>
-          <a:off x="0" y="0"/>
-          <a:ext cx="0" cy="0"/>
-          <a:chOff x="0" y="0"/>
-          <a:chExt cx="0" cy="0"/>
-        </a:xfrm>
-      </p:grpSpPr>
-      <p:sp>
-        <p:nvSpPr>
-          <p:cNvPr id="5" name="Slide Number Placeholder 4">
-            <a:extLst>
-              <a:ext uri="{FF2B5EF4-FFF2-40B4-BE49-F238E27FC236}">
-                <a16:creationId xmlns:a16="http://schemas.microsoft.com/office/drawing/2014/main" id="{CB47E829-DF3A-9387-D25D-A5EDBFB72276}"/>
-              </a:ext>
-            </a:extLst>
-          </p:cNvPr>
-          <p:cNvSpPr>
-            <a:spLocks noGrp="1"/>
-          </p:cNvSpPr>
-          <p:nvPr>
-            <p:ph type="sldNum" sz="quarter" idx="18"/>
-          </p:nvPr>
-        </p:nvSpPr>
-        <p:spPr>
-          <a:xfrm>
-            <a:off x="11208568" y="6526800"/>
-            <a:ext cx="288032" cy="108000"/>
-          </a:xfrm>
-        </p:spPr>
-        <p:txBody>
-          <a:bodyPr anchor="ctr">
-            <a:normAutofit/>
-          </a:bodyPr>
-          <a:lstStyle/>
-          <a:p>
-            <a:pPr>
-              <a:spcAft>
-                <a:spcPts val="600"/>
-              </a:spcAft>
-            </a:pPr>
-            <a:fld id="{E917DE0E-AFB1-41FD-BC35-27DB61CA125F}" type="slidenum">
-              <a:rPr lang="en-AU" sz="700" smtClean="0"/>
-              <a:pPr>
-                <a:spcAft>
-                  <a:spcPts val="600"/>
-                </a:spcAft>
-              </a:pPr>
-              <a:t>4</a:t>
-            </a:fld>
-            <a:endParaRPr lang="en-AU" sz="700"/>
-          </a:p>
-        </p:txBody>
-      </p:sp>
-      <p:sp>
-        <p:nvSpPr>
-          <p:cNvPr id="4" name="Title 3">
-            <a:extLst>
-              <a:ext uri="{FF2B5EF4-FFF2-40B4-BE49-F238E27FC236}">
-                <a16:creationId xmlns:a16="http://schemas.microsoft.com/office/drawing/2014/main" id="{2C762DEC-1CD9-028A-503D-0A96EDD9F2EA}"/>
-              </a:ext>
-            </a:extLst>
-          </p:cNvPr>
-          <p:cNvSpPr>
-            <a:spLocks noGrp="1"/>
-          </p:cNvSpPr>
-          <p:nvPr>
-            <p:ph type="title"/>
-          </p:nvPr>
-        </p:nvSpPr>
-        <p:spPr/>
-        <p:txBody>
-          <a:bodyPr/>
-          <a:lstStyle/>
-          <a:p>
-            <a:r>
-              <a:rPr lang="en-US" dirty="0" err="1"/>
-              <a:t>rrnDB</a:t>
-            </a:r>
-            <a:r>
-              <a:rPr lang="en-US" dirty="0"/>
-              <a:t>: The Ribosomal RNA Database</a:t>
-            </a:r>
-          </a:p>
-        </p:txBody>
-      </p:sp>
-      <p:pic>
-        <p:nvPicPr>
-          <p:cNvPr id="12" name="Content Placeholder 11" descr="A close-up of a document&#10;&#10;AI-generated content may be incorrect.">
-            <a:extLst>
-              <a:ext uri="{FF2B5EF4-FFF2-40B4-BE49-F238E27FC236}">
-                <a16:creationId xmlns:a16="http://schemas.microsoft.com/office/drawing/2014/main" id="{4E611383-8638-B971-1D00-A8331E0D4ACD}"/>
-              </a:ext>
-            </a:extLst>
-          </p:cNvPr>
-          <p:cNvPicPr>
-            <a:picLocks noGrp="1" noChangeAspect="1"/>
-          </p:cNvPicPr>
-          <p:nvPr>
-            <p:ph sz="quarter" idx="10"/>
-          </p:nvPr>
-        </p:nvPicPr>
-        <p:blipFill>
-          <a:blip r:embed="rId2"/>
-          <a:stretch>
-            <a:fillRect/>
-          </a:stretch>
-        </p:blipFill>
-        <p:spPr>
-          <a:xfrm>
-            <a:off x="695325" y="1597494"/>
-            <a:ext cx="9577388" cy="4348813"/>
-          </a:xfrm>
-        </p:spPr>
-      </p:pic>
-    </p:spTree>
-    <p:extLst>
-      <p:ext uri="{BB962C8B-B14F-4D97-AF65-F5344CB8AC3E}">
-        <p14:creationId xmlns:p14="http://schemas.microsoft.com/office/powerpoint/2010/main" val="4289535149"/>
-      </p:ext>
-    </p:extLst>
-  </p:cSld>
-  <p:clrMapOvr>
-    <a:masterClrMapping/>
-  </p:clrMapOvr>
-  <mc:AlternateContent xmlns:mc="http://schemas.openxmlformats.org/markup-compatibility/2006" xmlns:p14="http://schemas.microsoft.com/office/powerpoint/2010/main">
-    <mc:Choice Requires="p14">
-      <p:transition spd="med" p14:dur="700">
-        <p:fade/>
-      </p:transition>
-    </mc:Choice>
-    <mc:Fallback xmlns="">
-      <p:transition spd="med">
-        <p:fade/>
-      </p:transition>
-    </mc:Fallback>
-  </mc:AlternateContent>
-</p:sld>
-</file>
-
-<file path=ppt/slides/slide5.xml><?xml version="1.0" encoding="utf-8"?>
-<p:sld xmlns:a="http://schemas.openxmlformats.org/drawingml/2006/main" xmlns:r="http://schemas.openxmlformats.org/officeDocument/2006/relationships" xmlns:p="http://schemas.openxmlformats.org/presentationml/2006/main">
-  <p:cSld>
-    <p:spTree>
-      <p:nvGrpSpPr>
-        <p:cNvPr id="1" name="">
-          <a:extLst>
-            <a:ext uri="{FF2B5EF4-FFF2-40B4-BE49-F238E27FC236}">
-              <a16:creationId xmlns:a16="http://schemas.microsoft.com/office/drawing/2014/main" id="{1E1A17ED-BB1D-276E-713B-A104785A0F8B}"/>
-            </a:ext>
-          </a:extLst>
-        </p:cNvPr>
-        <p:cNvGrpSpPr/>
-        <p:nvPr/>
-      </p:nvGrpSpPr>
-      <p:grpSpPr>
-        <a:xfrm>
-          <a:off x="0" y="0"/>
-          <a:ext cx="0" cy="0"/>
-          <a:chOff x="0" y="0"/>
-          <a:chExt cx="0" cy="0"/>
-        </a:xfrm>
-      </p:grpSpPr>
-      <p:sp>
-        <p:nvSpPr>
-          <p:cNvPr id="5" name="Slide Number Placeholder 4">
-            <a:extLst>
-              <a:ext uri="{FF2B5EF4-FFF2-40B4-BE49-F238E27FC236}">
-                <a16:creationId xmlns:a16="http://schemas.microsoft.com/office/drawing/2014/main" id="{2139AEB6-4847-4DE7-B801-AB65FF2C0AED}"/>
-              </a:ext>
-            </a:extLst>
-          </p:cNvPr>
-          <p:cNvSpPr>
-            <a:spLocks noGrp="1"/>
-          </p:cNvSpPr>
-          <p:nvPr>
-            <p:ph type="sldNum" sz="quarter" idx="18"/>
-          </p:nvPr>
-        </p:nvSpPr>
-        <p:spPr>
-          <a:xfrm>
-            <a:off x="11208568" y="6526800"/>
-            <a:ext cx="288032" cy="108000"/>
-          </a:xfrm>
-        </p:spPr>
-        <p:txBody>
-          <a:bodyPr anchor="ctr">
-            <a:normAutofit/>
-          </a:bodyPr>
-          <a:lstStyle/>
-          <a:p>
-            <a:pPr>
-              <a:spcAft>
-                <a:spcPts val="600"/>
-              </a:spcAft>
-            </a:pPr>
-            <a:fld id="{E917DE0E-AFB1-41FD-BC35-27DB61CA125F}" type="slidenum">
-              <a:rPr lang="en-AU" sz="700" smtClean="0"/>
-              <a:pPr>
-                <a:spcAft>
-                  <a:spcPts val="600"/>
-                </a:spcAft>
-              </a:pPr>
-              <a:t>5</a:t>
-            </a:fld>
-            <a:endParaRPr lang="en-AU" sz="700"/>
-          </a:p>
-        </p:txBody>
-      </p:sp>
-      <p:sp>
-        <p:nvSpPr>
-          <p:cNvPr id="4" name="Title 3">
-            <a:extLst>
-              <a:ext uri="{FF2B5EF4-FFF2-40B4-BE49-F238E27FC236}">
-                <a16:creationId xmlns:a16="http://schemas.microsoft.com/office/drawing/2014/main" id="{E3F22A10-DC18-9763-581A-EB12AD10B288}"/>
-              </a:ext>
-            </a:extLst>
-          </p:cNvPr>
-          <p:cNvSpPr>
-            <a:spLocks noGrp="1"/>
-          </p:cNvSpPr>
-          <p:nvPr>
-            <p:ph type="title"/>
-          </p:nvPr>
-        </p:nvSpPr>
-        <p:spPr/>
-        <p:txBody>
-          <a:bodyPr/>
-          <a:lstStyle/>
-          <a:p>
-            <a:r>
-              <a:rPr lang="en-US" dirty="0" err="1"/>
-              <a:t>rrnDB</a:t>
-            </a:r>
-            <a:r>
-              <a:rPr lang="en-US" dirty="0"/>
-              <a:t>: Records Curation</a:t>
-            </a:r>
-            <a:br>
-              <a:rPr lang="en-US" dirty="0"/>
-            </a:br>
-            <a:endParaRPr lang="en-US" dirty="0"/>
-          </a:p>
-        </p:txBody>
-      </p:sp>
-      <p:sp>
-        <p:nvSpPr>
-          <p:cNvPr id="3" name="Content Placeholder 2">
-            <a:extLst>
-              <a:ext uri="{FF2B5EF4-FFF2-40B4-BE49-F238E27FC236}">
-                <a16:creationId xmlns:a16="http://schemas.microsoft.com/office/drawing/2014/main" id="{37821F7B-BC93-AAEB-AD8D-927664A6DA35}"/>
-              </a:ext>
-            </a:extLst>
-          </p:cNvPr>
-          <p:cNvSpPr>
-            <a:spLocks noGrp="1"/>
-          </p:cNvSpPr>
-          <p:nvPr>
-            <p:ph sz="quarter" idx="10"/>
-          </p:nvPr>
-        </p:nvSpPr>
-        <p:spPr/>
-        <p:txBody>
-          <a:bodyPr/>
-          <a:lstStyle/>
-          <a:p>
-            <a:r>
-              <a:rPr lang="en-US" b="0" dirty="0"/>
-              <a:t>48077 Bacteria records representing 12138 species</a:t>
-            </a:r>
-          </a:p>
-          <a:p>
-            <a:endParaRPr lang="en-US" dirty="0"/>
-          </a:p>
-        </p:txBody>
-      </p:sp>
-      <p:pic>
-        <p:nvPicPr>
-          <p:cNvPr id="7" name="Picture 6" descr="A white background with black and white clouds&#10;&#10;AI-generated content may be incorrect.">
-            <a:extLst>
-              <a:ext uri="{FF2B5EF4-FFF2-40B4-BE49-F238E27FC236}">
-                <a16:creationId xmlns:a16="http://schemas.microsoft.com/office/drawing/2014/main" id="{C766F0BD-8035-C6EA-FE16-BD7443DD9EFC}"/>
-              </a:ext>
-            </a:extLst>
-          </p:cNvPr>
-          <p:cNvPicPr>
-            <a:picLocks noChangeAspect="1"/>
-          </p:cNvPicPr>
-          <p:nvPr/>
-        </p:nvPicPr>
-        <p:blipFill>
-          <a:blip r:embed="rId2"/>
-          <a:stretch>
-            <a:fillRect/>
-          </a:stretch>
-        </p:blipFill>
-        <p:spPr>
-          <a:xfrm>
-            <a:off x="142446" y="2209800"/>
-            <a:ext cx="11907107" cy="1659452"/>
-          </a:xfrm>
-          <a:prstGeom prst="rect">
-            <a:avLst/>
-          </a:prstGeom>
-        </p:spPr>
-      </p:pic>
-    </p:spTree>
-    <p:extLst>
-      <p:ext uri="{BB962C8B-B14F-4D97-AF65-F5344CB8AC3E}">
-        <p14:creationId xmlns:p14="http://schemas.microsoft.com/office/powerpoint/2010/main" val="2602068393"/>
       </p:ext>
     </p:extLst>
   </p:cSld>
@@ -34836,12 +36711,9 @@
 </file>
 
 <file path=customXml/item1.xml><?xml version="1.0" encoding="utf-8"?>
-<?mso-contentType ?>
-<FormTemplates xmlns="http://schemas.microsoft.com/sharepoint/v3/contenttype/forms">
-  <Display>DocumentLibraryForm</Display>
-  <Edit>DocumentLibraryForm</Edit>
-  <New>DocumentLibraryForm</New>
-</FormTemplates>
+<p:properties xmlns:p="http://schemas.microsoft.com/office/2006/metadata/properties" xmlns:xsi="http://www.w3.org/2001/XMLSchema-instance" xmlns:pc="http://schemas.microsoft.com/office/infopath/2007/PartnerControls">
+  <documentManagement/>
+</p:properties>
 </file>
 
 <file path=customXml/item2.xml><?xml version="1.0" encoding="utf-8"?>
@@ -34983,15 +36855,19 @@
 </file>
 
 <file path=customXml/item3.xml><?xml version="1.0" encoding="utf-8"?>
-<p:properties xmlns:p="http://schemas.microsoft.com/office/2006/metadata/properties" xmlns:xsi="http://www.w3.org/2001/XMLSchema-instance" xmlns:pc="http://schemas.microsoft.com/office/infopath/2007/PartnerControls">
-  <documentManagement/>
-</p:properties>
+<?mso-contentType ?>
+<FormTemplates xmlns="http://schemas.microsoft.com/sharepoint/v3/contenttype/forms">
+  <Display>DocumentLibraryForm</Display>
+  <Edit>DocumentLibraryForm</Edit>
+  <New>DocumentLibraryForm</New>
+</FormTemplates>
 </file>
 
 <file path=customXml/itemProps1.xml><?xml version="1.0" encoding="utf-8"?>
-<ds:datastoreItem xmlns:ds="http://schemas.openxmlformats.org/officeDocument/2006/customXml" ds:itemID="{732F4D4E-5CC3-44EF-852B-455B45EFC022}">
+<ds:datastoreItem xmlns:ds="http://schemas.openxmlformats.org/officeDocument/2006/customXml" ds:itemID="{0BA6ACFB-BBAF-41D0-B45A-5E57454824E9}">
   <ds:schemaRefs>
-    <ds:schemaRef ds:uri="http://schemas.microsoft.com/sharepoint/v3/contenttype/forms"/>
+    <ds:schemaRef ds:uri="http://schemas.microsoft.com/office/2006/metadata/properties"/>
+    <ds:schemaRef ds:uri="http://schemas.microsoft.com/office/infopath/2007/PartnerControls"/>
   </ds:schemaRefs>
 </ds:datastoreItem>
 </file>
@@ -35015,10 +36891,9 @@
 </file>
 
 <file path=customXml/itemProps3.xml><?xml version="1.0" encoding="utf-8"?>
-<ds:datastoreItem xmlns:ds="http://schemas.openxmlformats.org/officeDocument/2006/customXml" ds:itemID="{0BA6ACFB-BBAF-41D0-B45A-5E57454824E9}">
+<ds:datastoreItem xmlns:ds="http://schemas.openxmlformats.org/officeDocument/2006/customXml" ds:itemID="{732F4D4E-5CC3-44EF-852B-455B45EFC022}">
   <ds:schemaRefs>
-    <ds:schemaRef ds:uri="http://schemas.microsoft.com/office/2006/metadata/properties"/>
-    <ds:schemaRef ds:uri="http://schemas.microsoft.com/office/infopath/2007/PartnerControls"/>
+    <ds:schemaRef ds:uri="http://schemas.microsoft.com/sharepoint/v3/contenttype/forms"/>
   </ds:schemaRefs>
 </ds:datastoreItem>
 </file>
--- a/results/250916_Project_Update.pptx
+++ b/results/250916_Project_Update.pptx
@@ -224,7 +224,7 @@
           <a:p>
             <a:fld id="{412A36AD-C140-47B5-A0AA-2808AF1C1C9D}" type="datetimeFigureOut">
               <a:rPr lang="en-AU" smtClean="0"/>
-              <a:t>16/9/2025</a:t>
+              <a:t>18/9/2025</a:t>
             </a:fld>
             <a:endParaRPr lang="en-AU"/>
           </a:p>
@@ -389,7 +389,7 @@
           <a:p>
             <a:fld id="{2763829E-EB69-4A98-9D54-8D6822520B27}" type="datetimeFigureOut">
               <a:rPr lang="en-AU" smtClean="0"/>
-              <a:t>16/9/2025</a:t>
+              <a:t>18/9/2025</a:t>
             </a:fld>
             <a:endParaRPr lang="en-AU"/>
           </a:p>
@@ -35005,12 +35005,92 @@
           <a:chExt cx="0" cy="0"/>
         </a:xfrm>
       </p:grpSpPr>
+      <p:sp>
+        <p:nvSpPr>
+          <p:cNvPr id="3" name="Title 2">
+            <a:extLst>
+              <a:ext uri="{FF2B5EF4-FFF2-40B4-BE49-F238E27FC236}">
+                <a16:creationId xmlns:a16="http://schemas.microsoft.com/office/drawing/2014/main" id="{46E25887-A65A-2CC9-17DF-EF0A7695C797}"/>
+              </a:ext>
+            </a:extLst>
+          </p:cNvPr>
+          <p:cNvSpPr>
+            <a:spLocks noGrp="1"/>
+          </p:cNvSpPr>
+          <p:nvPr>
+            <p:ph type="title"/>
+          </p:nvPr>
+        </p:nvSpPr>
+        <p:spPr/>
+        <p:txBody>
+          <a:bodyPr/>
+          <a:lstStyle/>
+          <a:p>
+            <a:endParaRPr lang="en-US"/>
+          </a:p>
+        </p:txBody>
+      </p:sp>
+      <p:sp>
+        <p:nvSpPr>
+          <p:cNvPr id="4" name="Footer Placeholder 3">
+            <a:extLst>
+              <a:ext uri="{FF2B5EF4-FFF2-40B4-BE49-F238E27FC236}">
+                <a16:creationId xmlns:a16="http://schemas.microsoft.com/office/drawing/2014/main" id="{1028CC96-1FA5-0311-9EAB-3D5BAD411515}"/>
+              </a:ext>
+            </a:extLst>
+          </p:cNvPr>
+          <p:cNvSpPr>
+            <a:spLocks noGrp="1"/>
+          </p:cNvSpPr>
+          <p:nvPr>
+            <p:ph type="ftr" sz="quarter" idx="17"/>
+          </p:nvPr>
+        </p:nvSpPr>
+        <p:spPr/>
+        <p:txBody>
+          <a:bodyPr/>
+          <a:lstStyle/>
+          <a:p>
+            <a:endParaRPr lang="en-AU" dirty="0"/>
+          </a:p>
+        </p:txBody>
+      </p:sp>
+      <p:sp>
+        <p:nvSpPr>
+          <p:cNvPr id="5" name="Slide Number Placeholder 4">
+            <a:extLst>
+              <a:ext uri="{FF2B5EF4-FFF2-40B4-BE49-F238E27FC236}">
+                <a16:creationId xmlns:a16="http://schemas.microsoft.com/office/drawing/2014/main" id="{14B3AC84-785C-DBAA-017A-A11DC3F562B3}"/>
+              </a:ext>
+            </a:extLst>
+          </p:cNvPr>
+          <p:cNvSpPr>
+            <a:spLocks noGrp="1"/>
+          </p:cNvSpPr>
+          <p:nvPr>
+            <p:ph type="sldNum" sz="quarter" idx="18"/>
+          </p:nvPr>
+        </p:nvSpPr>
+        <p:spPr/>
+        <p:txBody>
+          <a:bodyPr/>
+          <a:lstStyle/>
+          <a:p>
+            <a:fld id="{E917DE0E-AFB1-41FD-BC35-27DB61CA125F}" type="slidenum">
+              <a:rPr lang="en-AU" smtClean="0"/>
+              <a:pPr/>
+              <a:t>5</a:t>
+            </a:fld>
+            <a:endParaRPr lang="en-AU" dirty="0"/>
+          </a:p>
+        </p:txBody>
+      </p:sp>
       <p:pic>
         <p:nvPicPr>
-          <p:cNvPr id="7" name="Content Placeholder 6">
-            <a:extLst>
-              <a:ext uri="{FF2B5EF4-FFF2-40B4-BE49-F238E27FC236}">
-                <a16:creationId xmlns:a16="http://schemas.microsoft.com/office/drawing/2014/main" id="{D89E592F-46B9-4A76-8ED0-542788F894A4}"/>
+          <p:cNvPr id="9" name="Content Placeholder 8">
+            <a:extLst>
+              <a:ext uri="{FF2B5EF4-FFF2-40B4-BE49-F238E27FC236}">
+                <a16:creationId xmlns:a16="http://schemas.microsoft.com/office/drawing/2014/main" id="{1B245DA2-0C47-31B4-1F59-DA95C3FC5A9B}"/>
               </a:ext>
             </a:extLst>
           </p:cNvPr>
@@ -35034,86 +35114,6 @@
           </a:xfrm>
         </p:spPr>
       </p:pic>
-      <p:sp>
-        <p:nvSpPr>
-          <p:cNvPr id="3" name="Title 2">
-            <a:extLst>
-              <a:ext uri="{FF2B5EF4-FFF2-40B4-BE49-F238E27FC236}">
-                <a16:creationId xmlns:a16="http://schemas.microsoft.com/office/drawing/2014/main" id="{46E25887-A65A-2CC9-17DF-EF0A7695C797}"/>
-              </a:ext>
-            </a:extLst>
-          </p:cNvPr>
-          <p:cNvSpPr>
-            <a:spLocks noGrp="1"/>
-          </p:cNvSpPr>
-          <p:nvPr>
-            <p:ph type="title"/>
-          </p:nvPr>
-        </p:nvSpPr>
-        <p:spPr/>
-        <p:txBody>
-          <a:bodyPr/>
-          <a:lstStyle/>
-          <a:p>
-            <a:endParaRPr lang="en-US"/>
-          </a:p>
-        </p:txBody>
-      </p:sp>
-      <p:sp>
-        <p:nvSpPr>
-          <p:cNvPr id="4" name="Footer Placeholder 3">
-            <a:extLst>
-              <a:ext uri="{FF2B5EF4-FFF2-40B4-BE49-F238E27FC236}">
-                <a16:creationId xmlns:a16="http://schemas.microsoft.com/office/drawing/2014/main" id="{1028CC96-1FA5-0311-9EAB-3D5BAD411515}"/>
-              </a:ext>
-            </a:extLst>
-          </p:cNvPr>
-          <p:cNvSpPr>
-            <a:spLocks noGrp="1"/>
-          </p:cNvSpPr>
-          <p:nvPr>
-            <p:ph type="ftr" sz="quarter" idx="17"/>
-          </p:nvPr>
-        </p:nvSpPr>
-        <p:spPr/>
-        <p:txBody>
-          <a:bodyPr/>
-          <a:lstStyle/>
-          <a:p>
-            <a:endParaRPr lang="en-AU" dirty="0"/>
-          </a:p>
-        </p:txBody>
-      </p:sp>
-      <p:sp>
-        <p:nvSpPr>
-          <p:cNvPr id="5" name="Slide Number Placeholder 4">
-            <a:extLst>
-              <a:ext uri="{FF2B5EF4-FFF2-40B4-BE49-F238E27FC236}">
-                <a16:creationId xmlns:a16="http://schemas.microsoft.com/office/drawing/2014/main" id="{14B3AC84-785C-DBAA-017A-A11DC3F562B3}"/>
-              </a:ext>
-            </a:extLst>
-          </p:cNvPr>
-          <p:cNvSpPr>
-            <a:spLocks noGrp="1"/>
-          </p:cNvSpPr>
-          <p:nvPr>
-            <p:ph type="sldNum" sz="quarter" idx="18"/>
-          </p:nvPr>
-        </p:nvSpPr>
-        <p:spPr/>
-        <p:txBody>
-          <a:bodyPr/>
-          <a:lstStyle/>
-          <a:p>
-            <a:fld id="{E917DE0E-AFB1-41FD-BC35-27DB61CA125F}" type="slidenum">
-              <a:rPr lang="en-AU" smtClean="0"/>
-              <a:pPr/>
-              <a:t>5</a:t>
-            </a:fld>
-            <a:endParaRPr lang="en-AU" dirty="0"/>
-          </a:p>
-        </p:txBody>
-      </p:sp>
     </p:spTree>
     <p:extLst>
       <p:ext uri="{BB962C8B-B14F-4D97-AF65-F5344CB8AC3E}">
@@ -35156,12 +35156,92 @@
           <a:chExt cx="0" cy="0"/>
         </a:xfrm>
       </p:grpSpPr>
+      <p:sp>
+        <p:nvSpPr>
+          <p:cNvPr id="3" name="Title 2">
+            <a:extLst>
+              <a:ext uri="{FF2B5EF4-FFF2-40B4-BE49-F238E27FC236}">
+                <a16:creationId xmlns:a16="http://schemas.microsoft.com/office/drawing/2014/main" id="{D6FEBD5F-0B2B-0D21-E8BA-68876B211339}"/>
+              </a:ext>
+            </a:extLst>
+          </p:cNvPr>
+          <p:cNvSpPr>
+            <a:spLocks noGrp="1"/>
+          </p:cNvSpPr>
+          <p:nvPr>
+            <p:ph type="title"/>
+          </p:nvPr>
+        </p:nvSpPr>
+        <p:spPr/>
+        <p:txBody>
+          <a:bodyPr/>
+          <a:lstStyle/>
+          <a:p>
+            <a:endParaRPr lang="en-US"/>
+          </a:p>
+        </p:txBody>
+      </p:sp>
+      <p:sp>
+        <p:nvSpPr>
+          <p:cNvPr id="4" name="Footer Placeholder 3">
+            <a:extLst>
+              <a:ext uri="{FF2B5EF4-FFF2-40B4-BE49-F238E27FC236}">
+                <a16:creationId xmlns:a16="http://schemas.microsoft.com/office/drawing/2014/main" id="{EEF452CB-4F3B-818D-D0F5-F2560DBFCCEE}"/>
+              </a:ext>
+            </a:extLst>
+          </p:cNvPr>
+          <p:cNvSpPr>
+            <a:spLocks noGrp="1"/>
+          </p:cNvSpPr>
+          <p:nvPr>
+            <p:ph type="ftr" sz="quarter" idx="17"/>
+          </p:nvPr>
+        </p:nvSpPr>
+        <p:spPr/>
+        <p:txBody>
+          <a:bodyPr/>
+          <a:lstStyle/>
+          <a:p>
+            <a:endParaRPr lang="en-AU" dirty="0"/>
+          </a:p>
+        </p:txBody>
+      </p:sp>
+      <p:sp>
+        <p:nvSpPr>
+          <p:cNvPr id="5" name="Slide Number Placeholder 4">
+            <a:extLst>
+              <a:ext uri="{FF2B5EF4-FFF2-40B4-BE49-F238E27FC236}">
+                <a16:creationId xmlns:a16="http://schemas.microsoft.com/office/drawing/2014/main" id="{BB739E17-BC9B-F9F5-641E-F8A972EA2405}"/>
+              </a:ext>
+            </a:extLst>
+          </p:cNvPr>
+          <p:cNvSpPr>
+            <a:spLocks noGrp="1"/>
+          </p:cNvSpPr>
+          <p:nvPr>
+            <p:ph type="sldNum" sz="quarter" idx="18"/>
+          </p:nvPr>
+        </p:nvSpPr>
+        <p:spPr/>
+        <p:txBody>
+          <a:bodyPr/>
+          <a:lstStyle/>
+          <a:p>
+            <a:fld id="{E917DE0E-AFB1-41FD-BC35-27DB61CA125F}" type="slidenum">
+              <a:rPr lang="en-AU" smtClean="0"/>
+              <a:pPr/>
+              <a:t>6</a:t>
+            </a:fld>
+            <a:endParaRPr lang="en-AU" dirty="0"/>
+          </a:p>
+        </p:txBody>
+      </p:sp>
       <p:pic>
         <p:nvPicPr>
-          <p:cNvPr id="7" name="Content Placeholder 6">
-            <a:extLst>
-              <a:ext uri="{FF2B5EF4-FFF2-40B4-BE49-F238E27FC236}">
-                <a16:creationId xmlns:a16="http://schemas.microsoft.com/office/drawing/2014/main" id="{5B662688-CF95-C00F-54EE-96AC71EB82BA}"/>
+          <p:cNvPr id="9" name="Content Placeholder 8">
+            <a:extLst>
+              <a:ext uri="{FF2B5EF4-FFF2-40B4-BE49-F238E27FC236}">
+                <a16:creationId xmlns:a16="http://schemas.microsoft.com/office/drawing/2014/main" id="{1A6D1339-EF44-E934-81CF-8D2CE214EEA0}"/>
               </a:ext>
             </a:extLst>
           </p:cNvPr>
@@ -35185,86 +35265,6 @@
           </a:xfrm>
         </p:spPr>
       </p:pic>
-      <p:sp>
-        <p:nvSpPr>
-          <p:cNvPr id="3" name="Title 2">
-            <a:extLst>
-              <a:ext uri="{FF2B5EF4-FFF2-40B4-BE49-F238E27FC236}">
-                <a16:creationId xmlns:a16="http://schemas.microsoft.com/office/drawing/2014/main" id="{D6FEBD5F-0B2B-0D21-E8BA-68876B211339}"/>
-              </a:ext>
-            </a:extLst>
-          </p:cNvPr>
-          <p:cNvSpPr>
-            <a:spLocks noGrp="1"/>
-          </p:cNvSpPr>
-          <p:nvPr>
-            <p:ph type="title"/>
-          </p:nvPr>
-        </p:nvSpPr>
-        <p:spPr/>
-        <p:txBody>
-          <a:bodyPr/>
-          <a:lstStyle/>
-          <a:p>
-            <a:endParaRPr lang="en-US"/>
-          </a:p>
-        </p:txBody>
-      </p:sp>
-      <p:sp>
-        <p:nvSpPr>
-          <p:cNvPr id="4" name="Footer Placeholder 3">
-            <a:extLst>
-              <a:ext uri="{FF2B5EF4-FFF2-40B4-BE49-F238E27FC236}">
-                <a16:creationId xmlns:a16="http://schemas.microsoft.com/office/drawing/2014/main" id="{EEF452CB-4F3B-818D-D0F5-F2560DBFCCEE}"/>
-              </a:ext>
-            </a:extLst>
-          </p:cNvPr>
-          <p:cNvSpPr>
-            <a:spLocks noGrp="1"/>
-          </p:cNvSpPr>
-          <p:nvPr>
-            <p:ph type="ftr" sz="quarter" idx="17"/>
-          </p:nvPr>
-        </p:nvSpPr>
-        <p:spPr/>
-        <p:txBody>
-          <a:bodyPr/>
-          <a:lstStyle/>
-          <a:p>
-            <a:endParaRPr lang="en-AU" dirty="0"/>
-          </a:p>
-        </p:txBody>
-      </p:sp>
-      <p:sp>
-        <p:nvSpPr>
-          <p:cNvPr id="5" name="Slide Number Placeholder 4">
-            <a:extLst>
-              <a:ext uri="{FF2B5EF4-FFF2-40B4-BE49-F238E27FC236}">
-                <a16:creationId xmlns:a16="http://schemas.microsoft.com/office/drawing/2014/main" id="{BB739E17-BC9B-F9F5-641E-F8A972EA2405}"/>
-              </a:ext>
-            </a:extLst>
-          </p:cNvPr>
-          <p:cNvSpPr>
-            <a:spLocks noGrp="1"/>
-          </p:cNvSpPr>
-          <p:nvPr>
-            <p:ph type="sldNum" sz="quarter" idx="18"/>
-          </p:nvPr>
-        </p:nvSpPr>
-        <p:spPr/>
-        <p:txBody>
-          <a:bodyPr/>
-          <a:lstStyle/>
-          <a:p>
-            <a:fld id="{E917DE0E-AFB1-41FD-BC35-27DB61CA125F}" type="slidenum">
-              <a:rPr lang="en-AU" smtClean="0"/>
-              <a:pPr/>
-              <a:t>6</a:t>
-            </a:fld>
-            <a:endParaRPr lang="en-AU" dirty="0"/>
-          </a:p>
-        </p:txBody>
-      </p:sp>
     </p:spTree>
     <p:extLst>
       <p:ext uri="{BB962C8B-B14F-4D97-AF65-F5344CB8AC3E}">
@@ -36711,9 +36711,12 @@
 </file>
 
 <file path=customXml/item1.xml><?xml version="1.0" encoding="utf-8"?>
-<p:properties xmlns:p="http://schemas.microsoft.com/office/2006/metadata/properties" xmlns:xsi="http://www.w3.org/2001/XMLSchema-instance" xmlns:pc="http://schemas.microsoft.com/office/infopath/2007/PartnerControls">
-  <documentManagement/>
-</p:properties>
+<?mso-contentType ?>
+<FormTemplates xmlns="http://schemas.microsoft.com/sharepoint/v3/contenttype/forms">
+  <Display>DocumentLibraryForm</Display>
+  <Edit>DocumentLibraryForm</Edit>
+  <New>DocumentLibraryForm</New>
+</FormTemplates>
 </file>
 
 <file path=customXml/item2.xml><?xml version="1.0" encoding="utf-8"?>
@@ -36855,19 +36858,15 @@
 </file>
 
 <file path=customXml/item3.xml><?xml version="1.0" encoding="utf-8"?>
-<?mso-contentType ?>
-<FormTemplates xmlns="http://schemas.microsoft.com/sharepoint/v3/contenttype/forms">
-  <Display>DocumentLibraryForm</Display>
-  <Edit>DocumentLibraryForm</Edit>
-  <New>DocumentLibraryForm</New>
-</FormTemplates>
+<p:properties xmlns:p="http://schemas.microsoft.com/office/2006/metadata/properties" xmlns:xsi="http://www.w3.org/2001/XMLSchema-instance" xmlns:pc="http://schemas.microsoft.com/office/infopath/2007/PartnerControls">
+  <documentManagement/>
+</p:properties>
 </file>
 
 <file path=customXml/itemProps1.xml><?xml version="1.0" encoding="utf-8"?>
-<ds:datastoreItem xmlns:ds="http://schemas.openxmlformats.org/officeDocument/2006/customXml" ds:itemID="{0BA6ACFB-BBAF-41D0-B45A-5E57454824E9}">
+<ds:datastoreItem xmlns:ds="http://schemas.openxmlformats.org/officeDocument/2006/customXml" ds:itemID="{732F4D4E-5CC3-44EF-852B-455B45EFC022}">
   <ds:schemaRefs>
-    <ds:schemaRef ds:uri="http://schemas.microsoft.com/office/2006/metadata/properties"/>
-    <ds:schemaRef ds:uri="http://schemas.microsoft.com/office/infopath/2007/PartnerControls"/>
+    <ds:schemaRef ds:uri="http://schemas.microsoft.com/sharepoint/v3/contenttype/forms"/>
   </ds:schemaRefs>
 </ds:datastoreItem>
 </file>
@@ -36891,9 +36890,10 @@
 </file>
 
 <file path=customXml/itemProps3.xml><?xml version="1.0" encoding="utf-8"?>
-<ds:datastoreItem xmlns:ds="http://schemas.openxmlformats.org/officeDocument/2006/customXml" ds:itemID="{732F4D4E-5CC3-44EF-852B-455B45EFC022}">
+<ds:datastoreItem xmlns:ds="http://schemas.openxmlformats.org/officeDocument/2006/customXml" ds:itemID="{0BA6ACFB-BBAF-41D0-B45A-5E57454824E9}">
   <ds:schemaRefs>
-    <ds:schemaRef ds:uri="http://schemas.microsoft.com/sharepoint/v3/contenttype/forms"/>
+    <ds:schemaRef ds:uri="http://schemas.microsoft.com/office/2006/metadata/properties"/>
+    <ds:schemaRef ds:uri="http://schemas.microsoft.com/office/infopath/2007/PartnerControls"/>
   </ds:schemaRefs>
 </ds:datastoreItem>
 </file>